--- a/assets/figures-editable/c1-c2/c2-e15.pptx
+++ b/assets/figures-editable/c1-c2/c2-e15.pptx
@@ -7,7 +7,7 @@
   <p:sldIdLst>
     <p:sldId id="256" r:id="rId7"/>
   </p:sldIdLst>
-  <p:sldSz cx="11948160" cy="8095488" type="screen4x3"/>
+  <p:sldSz cx="12191695" cy="6858000" type="screen4x3"/>
   <p:notesSz cx="6858000" cy="9144000"/>
   <p:defaultTextStyle>
     <a:defPPr>
@@ -3098,14 +3098,14 @@
       <p:grpSpPr/>
       <p:sp>
         <p:nvSpPr>
-          <p:cNvPr id="2" name="text1" descr="sci-ppt:C2-E15-001"/>
+          <p:cNvPr id="2" name="C2-E15 text 0" descr="sci-ppt:o000"/>
           <p:cNvSpPr txBox="1"/>
           <p:nvPr/>
         </p:nvSpPr>
         <p:spPr>
           <a:xfrm>
-            <a:off x="316992" y="268224"/>
-            <a:ext cx="11277600" cy="359054"/>
+            <a:off x="274320" y="118872"/>
+            <a:ext cx="11612880" cy="340105"/>
           </a:xfrm>
           <a:prstGeom prst="rect">
             <a:avLst/>
@@ -3114,7 +3114,7 @@
           <a:effectLst/>
         </p:spPr>
         <p:txBody>
-          <a:bodyPr wrap="none" lIns="27432" rIns="27432" tIns="18288" bIns="18288" anchor="ctr">
+          <a:bodyPr wrap="none" lIns="18288" rIns="18288" tIns="18288" bIns="18288" anchor="t">
             <a:spAutoFit/>
           </a:bodyPr>
           <a:lstStyle/>
@@ -3125,37 +3125,2068 @@
               </a:spcAft>
             </a:pPr>
             <a:r>
-              <a:rPr sz="1823" b="0" i="0">
+              <a:rPr sz="1900" b="1" i="0">
                 <a:solidFill>
                   <a:srgbClr val="8EDBD4"/>
                 </a:solidFill>
                 <a:latin typeface="Arial"/>
               </a:rPr>
-              <a:t>C2-E15 | Physical-variable diagram</a:t>
-            </a:r>
-          </a:p>
-        </p:txBody>
-      </p:sp>
-      <p:sp>
-        <p:nvSpPr>
-          <p:cNvPr id="3" name="ellipse2" descr="sci-ppt:C2-E15-002"/>
+              <a:t>C2-E15 · Derived critical radius and branch check</a:t>
+            </a:r>
+          </a:p>
+        </p:txBody>
+      </p:sp>
+      <p:cxnSp>
+        <p:nvCxnSpPr>
+          <p:cNvPr id="3" name="C2-E15 line 1" descr="sci-ppt:o001"/>
+          <p:cNvCxnSpPr/>
+          <p:nvPr/>
+        </p:nvCxnSpPr>
+        <p:spPr>
+          <a:xfrm>
+            <a:off x="914400" y="5029200"/>
+            <a:ext cx="6035040" cy="0"/>
+          </a:xfrm>
+          <a:prstGeom prst="line">
+            <a:avLst/>
+          </a:prstGeom>
+          <a:ln w="19050">
+            <a:solidFill>
+              <a:srgbClr val="B4C7D2"/>
+            </a:solidFill>
+          </a:ln>
+          <a:effectLst/>
+        </p:spPr>
+      </p:cxnSp>
+      <p:cxnSp>
+        <p:nvCxnSpPr>
+          <p:cNvPr id="4" name="C2-E15 line 2" descr="sci-ppt:o002"/>
+          <p:cNvCxnSpPr/>
+          <p:nvPr/>
+        </p:nvCxnSpPr>
+        <p:spPr>
+          <a:xfrm>
+            <a:off x="914400" y="1371600"/>
+            <a:ext cx="0" cy="3657600"/>
+          </a:xfrm>
+          <a:prstGeom prst="line">
+            <a:avLst/>
+          </a:prstGeom>
+          <a:ln w="19050">
+            <a:solidFill>
+              <a:srgbClr val="B4C7D2"/>
+            </a:solidFill>
+          </a:ln>
+          <a:effectLst/>
+        </p:spPr>
+      </p:cxnSp>
+      <p:cxnSp>
+        <p:nvCxnSpPr>
+          <p:cNvPr id="5" name="C2-E15 line 3" descr="sci-ppt:o003"/>
+          <p:cNvCxnSpPr/>
+          <p:nvPr/>
+        </p:nvCxnSpPr>
+        <p:spPr>
+          <a:xfrm>
+            <a:off x="914400" y="5029200"/>
+            <a:ext cx="0" cy="64008"/>
+          </a:xfrm>
+          <a:prstGeom prst="line">
+            <a:avLst/>
+          </a:prstGeom>
+          <a:ln w="12700">
+            <a:solidFill>
+              <a:srgbClr val="B4C7D2"/>
+            </a:solidFill>
+          </a:ln>
+          <a:effectLst/>
+        </p:spPr>
+      </p:cxnSp>
+      <p:cxnSp>
+        <p:nvCxnSpPr>
+          <p:cNvPr id="6" name="C2-E15 line 4" descr="sci-ppt:o004"/>
+          <p:cNvCxnSpPr/>
+          <p:nvPr/>
+        </p:nvCxnSpPr>
+        <p:spPr>
+          <a:xfrm>
+            <a:off x="914400" y="1371600"/>
+            <a:ext cx="0" cy="3657600"/>
+          </a:xfrm>
+          <a:prstGeom prst="line">
+            <a:avLst/>
+          </a:prstGeom>
+          <a:ln w="7620">
+            <a:solidFill>
+              <a:srgbClr val="2E4756"/>
+            </a:solidFill>
+          </a:ln>
+          <a:effectLst/>
+        </p:spPr>
+      </p:cxnSp>
+      <p:sp>
+        <p:nvSpPr>
+          <p:cNvPr id="7" name="C2-E15 text 5" descr="sci-ppt:o005"/>
+          <p:cNvSpPr txBox="1"/>
+          <p:nvPr/>
+        </p:nvSpPr>
+        <p:spPr>
+          <a:xfrm>
+            <a:off x="457200" y="5111496"/>
+            <a:ext cx="914400" cy="208407"/>
+          </a:xfrm>
+          <a:prstGeom prst="rect">
+            <a:avLst/>
+          </a:prstGeom>
+          <a:noFill/>
+          <a:effectLst/>
+        </p:spPr>
+        <p:txBody>
+          <a:bodyPr wrap="none" lIns="18288" rIns="18288" tIns="18288" bIns="18288" anchor="t">
+            <a:spAutoFit/>
+          </a:bodyPr>
+          <a:lstStyle/>
+          <a:p>
+            <a:pPr algn="ctr">
+              <a:spcAft>
+                <a:spcPts val="0"/>
+              </a:spcAft>
+            </a:pPr>
+            <a:r>
+              <a:rPr sz="1050" b="0" i="0">
+                <a:solidFill>
+                  <a:srgbClr val="B4C7D2"/>
+                </a:solidFill>
+                <a:latin typeface="Arial"/>
+              </a:rPr>
+              <a:t>0.00</a:t>
+            </a:r>
+          </a:p>
+        </p:txBody>
+      </p:sp>
+      <p:cxnSp>
+        <p:nvCxnSpPr>
+          <p:cNvPr id="8" name="C2-E15 line 6" descr="sci-ppt:o006"/>
+          <p:cNvCxnSpPr/>
+          <p:nvPr/>
+        </p:nvCxnSpPr>
+        <p:spPr>
+          <a:xfrm>
+            <a:off x="2286000" y="5029200"/>
+            <a:ext cx="0" cy="64008"/>
+          </a:xfrm>
+          <a:prstGeom prst="line">
+            <a:avLst/>
+          </a:prstGeom>
+          <a:ln w="12700">
+            <a:solidFill>
+              <a:srgbClr val="B4C7D2"/>
+            </a:solidFill>
+          </a:ln>
+          <a:effectLst/>
+        </p:spPr>
+      </p:cxnSp>
+      <p:cxnSp>
+        <p:nvCxnSpPr>
+          <p:cNvPr id="9" name="C2-E15 line 7" descr="sci-ppt:o007"/>
+          <p:cNvCxnSpPr/>
+          <p:nvPr/>
+        </p:nvCxnSpPr>
+        <p:spPr>
+          <a:xfrm>
+            <a:off x="2286000" y="1371600"/>
+            <a:ext cx="0" cy="3657600"/>
+          </a:xfrm>
+          <a:prstGeom prst="line">
+            <a:avLst/>
+          </a:prstGeom>
+          <a:ln w="7620">
+            <a:solidFill>
+              <a:srgbClr val="2E4756"/>
+            </a:solidFill>
+          </a:ln>
+          <a:effectLst/>
+        </p:spPr>
+      </p:cxnSp>
+      <p:sp>
+        <p:nvSpPr>
+          <p:cNvPr id="10" name="C2-E15 text 8" descr="sci-ppt:o008"/>
+          <p:cNvSpPr txBox="1"/>
+          <p:nvPr/>
+        </p:nvSpPr>
+        <p:spPr>
+          <a:xfrm>
+            <a:off x="1828800" y="5111496"/>
+            <a:ext cx="914400" cy="208407"/>
+          </a:xfrm>
+          <a:prstGeom prst="rect">
+            <a:avLst/>
+          </a:prstGeom>
+          <a:noFill/>
+          <a:effectLst/>
+        </p:spPr>
+        <p:txBody>
+          <a:bodyPr wrap="none" lIns="18288" rIns="18288" tIns="18288" bIns="18288" anchor="t">
+            <a:spAutoFit/>
+          </a:bodyPr>
+          <a:lstStyle/>
+          <a:p>
+            <a:pPr algn="ctr">
+              <a:spcAft>
+                <a:spcPts val="0"/>
+              </a:spcAft>
+            </a:pPr>
+            <a:r>
+              <a:rPr sz="1050" b="0" i="0">
+                <a:solidFill>
+                  <a:srgbClr val="B4C7D2"/>
+                </a:solidFill>
+                <a:latin typeface="Arial"/>
+              </a:rPr>
+              <a:t>0.05</a:t>
+            </a:r>
+          </a:p>
+        </p:txBody>
+      </p:sp>
+      <p:cxnSp>
+        <p:nvCxnSpPr>
+          <p:cNvPr id="11" name="C2-E15 line 9" descr="sci-ppt:o009"/>
+          <p:cNvCxnSpPr/>
+          <p:nvPr/>
+        </p:nvCxnSpPr>
+        <p:spPr>
+          <a:xfrm>
+            <a:off x="3657600" y="5029200"/>
+            <a:ext cx="0" cy="64008"/>
+          </a:xfrm>
+          <a:prstGeom prst="line">
+            <a:avLst/>
+          </a:prstGeom>
+          <a:ln w="12700">
+            <a:solidFill>
+              <a:srgbClr val="B4C7D2"/>
+            </a:solidFill>
+          </a:ln>
+          <a:effectLst/>
+        </p:spPr>
+      </p:cxnSp>
+      <p:cxnSp>
+        <p:nvCxnSpPr>
+          <p:cNvPr id="12" name="C2-E15 line 10" descr="sci-ppt:o010"/>
+          <p:cNvCxnSpPr/>
+          <p:nvPr/>
+        </p:nvCxnSpPr>
+        <p:spPr>
+          <a:xfrm>
+            <a:off x="3657600" y="1371600"/>
+            <a:ext cx="0" cy="3657600"/>
+          </a:xfrm>
+          <a:prstGeom prst="line">
+            <a:avLst/>
+          </a:prstGeom>
+          <a:ln w="7620">
+            <a:solidFill>
+              <a:srgbClr val="2E4756"/>
+            </a:solidFill>
+          </a:ln>
+          <a:effectLst/>
+        </p:spPr>
+      </p:cxnSp>
+      <p:sp>
+        <p:nvSpPr>
+          <p:cNvPr id="13" name="C2-E15 text 11" descr="sci-ppt:o011"/>
+          <p:cNvSpPr txBox="1"/>
+          <p:nvPr/>
+        </p:nvSpPr>
+        <p:spPr>
+          <a:xfrm>
+            <a:off x="3200400" y="5111496"/>
+            <a:ext cx="914400" cy="208407"/>
+          </a:xfrm>
+          <a:prstGeom prst="rect">
+            <a:avLst/>
+          </a:prstGeom>
+          <a:noFill/>
+          <a:effectLst/>
+        </p:spPr>
+        <p:txBody>
+          <a:bodyPr wrap="none" lIns="18288" rIns="18288" tIns="18288" bIns="18288" anchor="t">
+            <a:spAutoFit/>
+          </a:bodyPr>
+          <a:lstStyle/>
+          <a:p>
+            <a:pPr algn="ctr">
+              <a:spcAft>
+                <a:spcPts val="0"/>
+              </a:spcAft>
+            </a:pPr>
+            <a:r>
+              <a:rPr sz="1050" b="0" i="0">
+                <a:solidFill>
+                  <a:srgbClr val="B4C7D2"/>
+                </a:solidFill>
+                <a:latin typeface="Arial"/>
+              </a:rPr>
+              <a:t>0.10</a:t>
+            </a:r>
+          </a:p>
+        </p:txBody>
+      </p:sp>
+      <p:cxnSp>
+        <p:nvCxnSpPr>
+          <p:cNvPr id="14" name="C2-E15 line 12" descr="sci-ppt:o012"/>
+          <p:cNvCxnSpPr/>
+          <p:nvPr/>
+        </p:nvCxnSpPr>
+        <p:spPr>
+          <a:xfrm>
+            <a:off x="5029199" y="5029200"/>
+            <a:ext cx="0" cy="64008"/>
+          </a:xfrm>
+          <a:prstGeom prst="line">
+            <a:avLst/>
+          </a:prstGeom>
+          <a:ln w="12700">
+            <a:solidFill>
+              <a:srgbClr val="B4C7D2"/>
+            </a:solidFill>
+          </a:ln>
+          <a:effectLst/>
+        </p:spPr>
+      </p:cxnSp>
+      <p:cxnSp>
+        <p:nvCxnSpPr>
+          <p:cNvPr id="15" name="C2-E15 line 13" descr="sci-ppt:o013"/>
+          <p:cNvCxnSpPr/>
+          <p:nvPr/>
+        </p:nvCxnSpPr>
+        <p:spPr>
+          <a:xfrm>
+            <a:off x="5029199" y="1371600"/>
+            <a:ext cx="0" cy="3657600"/>
+          </a:xfrm>
+          <a:prstGeom prst="line">
+            <a:avLst/>
+          </a:prstGeom>
+          <a:ln w="7620">
+            <a:solidFill>
+              <a:srgbClr val="2E4756"/>
+            </a:solidFill>
+          </a:ln>
+          <a:effectLst/>
+        </p:spPr>
+      </p:cxnSp>
+      <p:sp>
+        <p:nvSpPr>
+          <p:cNvPr id="16" name="C2-E15 text 14" descr="sci-ppt:o014"/>
+          <p:cNvSpPr txBox="1"/>
+          <p:nvPr/>
+        </p:nvSpPr>
+        <p:spPr>
+          <a:xfrm>
+            <a:off x="4571999" y="5111496"/>
+            <a:ext cx="914400" cy="208407"/>
+          </a:xfrm>
+          <a:prstGeom prst="rect">
+            <a:avLst/>
+          </a:prstGeom>
+          <a:noFill/>
+          <a:effectLst/>
+        </p:spPr>
+        <p:txBody>
+          <a:bodyPr wrap="none" lIns="18288" rIns="18288" tIns="18288" bIns="18288" anchor="t">
+            <a:spAutoFit/>
+          </a:bodyPr>
+          <a:lstStyle/>
+          <a:p>
+            <a:pPr algn="ctr">
+              <a:spcAft>
+                <a:spcPts val="0"/>
+              </a:spcAft>
+            </a:pPr>
+            <a:r>
+              <a:rPr sz="1050" b="0" i="0">
+                <a:solidFill>
+                  <a:srgbClr val="B4C7D2"/>
+                </a:solidFill>
+                <a:latin typeface="Arial"/>
+              </a:rPr>
+              <a:t>0.15</a:t>
+            </a:r>
+          </a:p>
+        </p:txBody>
+      </p:sp>
+      <p:cxnSp>
+        <p:nvCxnSpPr>
+          <p:cNvPr id="17" name="C2-E15 line 15" descr="sci-ppt:o015"/>
+          <p:cNvCxnSpPr/>
+          <p:nvPr/>
+        </p:nvCxnSpPr>
+        <p:spPr>
+          <a:xfrm>
+            <a:off x="6400800" y="5029200"/>
+            <a:ext cx="0" cy="64008"/>
+          </a:xfrm>
+          <a:prstGeom prst="line">
+            <a:avLst/>
+          </a:prstGeom>
+          <a:ln w="12700">
+            <a:solidFill>
+              <a:srgbClr val="B4C7D2"/>
+            </a:solidFill>
+          </a:ln>
+          <a:effectLst/>
+        </p:spPr>
+      </p:cxnSp>
+      <p:cxnSp>
+        <p:nvCxnSpPr>
+          <p:cNvPr id="18" name="C2-E15 line 16" descr="sci-ppt:o016"/>
+          <p:cNvCxnSpPr/>
+          <p:nvPr/>
+        </p:nvCxnSpPr>
+        <p:spPr>
+          <a:xfrm>
+            <a:off x="6400800" y="1371600"/>
+            <a:ext cx="0" cy="3657600"/>
+          </a:xfrm>
+          <a:prstGeom prst="line">
+            <a:avLst/>
+          </a:prstGeom>
+          <a:ln w="7620">
+            <a:solidFill>
+              <a:srgbClr val="2E4756"/>
+            </a:solidFill>
+          </a:ln>
+          <a:effectLst/>
+        </p:spPr>
+      </p:cxnSp>
+      <p:sp>
+        <p:nvSpPr>
+          <p:cNvPr id="19" name="C2-E15 text 17" descr="sci-ppt:o017"/>
+          <p:cNvSpPr txBox="1"/>
+          <p:nvPr/>
+        </p:nvSpPr>
+        <p:spPr>
+          <a:xfrm>
+            <a:off x="5943600" y="5111496"/>
+            <a:ext cx="914400" cy="208407"/>
+          </a:xfrm>
+          <a:prstGeom prst="rect">
+            <a:avLst/>
+          </a:prstGeom>
+          <a:noFill/>
+          <a:effectLst/>
+        </p:spPr>
+        <p:txBody>
+          <a:bodyPr wrap="none" lIns="18288" rIns="18288" tIns="18288" bIns="18288" anchor="t">
+            <a:spAutoFit/>
+          </a:bodyPr>
+          <a:lstStyle/>
+          <a:p>
+            <a:pPr algn="ctr">
+              <a:spcAft>
+                <a:spcPts val="0"/>
+              </a:spcAft>
+            </a:pPr>
+            <a:r>
+              <a:rPr sz="1050" b="0" i="0">
+                <a:solidFill>
+                  <a:srgbClr val="B4C7D2"/>
+                </a:solidFill>
+                <a:latin typeface="Arial"/>
+              </a:rPr>
+              <a:t>0.20</a:t>
+            </a:r>
+          </a:p>
+        </p:txBody>
+      </p:sp>
+      <p:cxnSp>
+        <p:nvCxnSpPr>
+          <p:cNvPr id="20" name="C2-E15 line 18" descr="sci-ppt:o018"/>
+          <p:cNvCxnSpPr/>
+          <p:nvPr/>
+        </p:nvCxnSpPr>
+        <p:spPr>
+          <a:xfrm>
+            <a:off x="850392" y="5029200"/>
+            <a:ext cx="64008" cy="0"/>
+          </a:xfrm>
+          <a:prstGeom prst="line">
+            <a:avLst/>
+          </a:prstGeom>
+          <a:ln w="12700">
+            <a:solidFill>
+              <a:srgbClr val="B4C7D2"/>
+            </a:solidFill>
+          </a:ln>
+          <a:effectLst/>
+        </p:spPr>
+      </p:cxnSp>
+      <p:cxnSp>
+        <p:nvCxnSpPr>
+          <p:cNvPr id="21" name="C2-E15 line 19" descr="sci-ppt:o019"/>
+          <p:cNvCxnSpPr/>
+          <p:nvPr/>
+        </p:nvCxnSpPr>
+        <p:spPr>
+          <a:xfrm>
+            <a:off x="850392" y="4216400"/>
+            <a:ext cx="64008" cy="0"/>
+          </a:xfrm>
+          <a:prstGeom prst="line">
+            <a:avLst/>
+          </a:prstGeom>
+          <a:ln w="12700">
+            <a:solidFill>
+              <a:srgbClr val="B4C7D2"/>
+            </a:solidFill>
+          </a:ln>
+          <a:effectLst/>
+        </p:spPr>
+      </p:cxnSp>
+      <p:cxnSp>
+        <p:nvCxnSpPr>
+          <p:cNvPr id="22" name="C2-E15 line 20" descr="sci-ppt:o020"/>
+          <p:cNvCxnSpPr/>
+          <p:nvPr/>
+        </p:nvCxnSpPr>
+        <p:spPr>
+          <a:xfrm>
+            <a:off x="914400" y="4216400"/>
+            <a:ext cx="6035040" cy="0"/>
+          </a:xfrm>
+          <a:prstGeom prst="line">
+            <a:avLst/>
+          </a:prstGeom>
+          <a:ln w="7620">
+            <a:solidFill>
+              <a:srgbClr val="2E4756"/>
+            </a:solidFill>
+          </a:ln>
+          <a:effectLst/>
+        </p:spPr>
+      </p:cxnSp>
+      <p:sp>
+        <p:nvSpPr>
+          <p:cNvPr id="23" name="C2-E15 text 21" descr="sci-ppt:o021"/>
+          <p:cNvSpPr txBox="1"/>
+          <p:nvPr/>
+        </p:nvSpPr>
+        <p:spPr>
+          <a:xfrm>
+            <a:off x="45720" y="4134104"/>
+            <a:ext cx="777240" cy="208407"/>
+          </a:xfrm>
+          <a:prstGeom prst="rect">
+            <a:avLst/>
+          </a:prstGeom>
+          <a:noFill/>
+          <a:effectLst/>
+        </p:spPr>
+        <p:txBody>
+          <a:bodyPr wrap="none" lIns="18288" rIns="18288" tIns="18288" bIns="18288" anchor="t">
+            <a:spAutoFit/>
+          </a:bodyPr>
+          <a:lstStyle/>
+          <a:p>
+            <a:pPr algn="r">
+              <a:spcAft>
+                <a:spcPts val="0"/>
+              </a:spcAft>
+            </a:pPr>
+            <a:r>
+              <a:rPr sz="1050" b="0" i="0">
+                <a:solidFill>
+                  <a:srgbClr val="B4C7D2"/>
+                </a:solidFill>
+                <a:latin typeface="Arial"/>
+              </a:rPr>
+              <a:t>-2</a:t>
+            </a:r>
+          </a:p>
+        </p:txBody>
+      </p:sp>
+      <p:cxnSp>
+        <p:nvCxnSpPr>
+          <p:cNvPr id="24" name="C2-E15 line 22" descr="sci-ppt:o022"/>
+          <p:cNvCxnSpPr/>
+          <p:nvPr/>
+        </p:nvCxnSpPr>
+        <p:spPr>
+          <a:xfrm>
+            <a:off x="850392" y="3403600"/>
+            <a:ext cx="64008" cy="0"/>
+          </a:xfrm>
+          <a:prstGeom prst="line">
+            <a:avLst/>
+          </a:prstGeom>
+          <a:ln w="12700">
+            <a:solidFill>
+              <a:srgbClr val="B4C7D2"/>
+            </a:solidFill>
+          </a:ln>
+          <a:effectLst/>
+        </p:spPr>
+      </p:cxnSp>
+      <p:cxnSp>
+        <p:nvCxnSpPr>
+          <p:cNvPr id="25" name="C2-E15 line 23" descr="sci-ppt:o023"/>
+          <p:cNvCxnSpPr/>
+          <p:nvPr/>
+        </p:nvCxnSpPr>
+        <p:spPr>
+          <a:xfrm>
+            <a:off x="914400" y="3403600"/>
+            <a:ext cx="6035040" cy="0"/>
+          </a:xfrm>
+          <a:prstGeom prst="line">
+            <a:avLst/>
+          </a:prstGeom>
+          <a:ln w="7620">
+            <a:solidFill>
+              <a:srgbClr val="2E4756"/>
+            </a:solidFill>
+          </a:ln>
+          <a:effectLst/>
+        </p:spPr>
+      </p:cxnSp>
+      <p:sp>
+        <p:nvSpPr>
+          <p:cNvPr id="26" name="C2-E15 text 24" descr="sci-ppt:o024"/>
+          <p:cNvSpPr txBox="1"/>
+          <p:nvPr/>
+        </p:nvSpPr>
+        <p:spPr>
+          <a:xfrm>
+            <a:off x="45720" y="3321304"/>
+            <a:ext cx="777240" cy="208407"/>
+          </a:xfrm>
+          <a:prstGeom prst="rect">
+            <a:avLst/>
+          </a:prstGeom>
+          <a:noFill/>
+          <a:effectLst/>
+        </p:spPr>
+        <p:txBody>
+          <a:bodyPr wrap="none" lIns="18288" rIns="18288" tIns="18288" bIns="18288" anchor="t">
+            <a:spAutoFit/>
+          </a:bodyPr>
+          <a:lstStyle/>
+          <a:p>
+            <a:pPr algn="r">
+              <a:spcAft>
+                <a:spcPts val="0"/>
+              </a:spcAft>
+            </a:pPr>
+            <a:r>
+              <a:rPr sz="1050" b="0" i="0">
+                <a:solidFill>
+                  <a:srgbClr val="B4C7D2"/>
+                </a:solidFill>
+                <a:latin typeface="Arial"/>
+              </a:rPr>
+              <a:t>0</a:t>
+            </a:r>
+          </a:p>
+        </p:txBody>
+      </p:sp>
+      <p:cxnSp>
+        <p:nvCxnSpPr>
+          <p:cNvPr id="27" name="C2-E15 line 25" descr="sci-ppt:o025"/>
+          <p:cNvCxnSpPr/>
+          <p:nvPr/>
+        </p:nvCxnSpPr>
+        <p:spPr>
+          <a:xfrm>
+            <a:off x="850392" y="2590800"/>
+            <a:ext cx="64008" cy="0"/>
+          </a:xfrm>
+          <a:prstGeom prst="line">
+            <a:avLst/>
+          </a:prstGeom>
+          <a:ln w="12700">
+            <a:solidFill>
+              <a:srgbClr val="B4C7D2"/>
+            </a:solidFill>
+          </a:ln>
+          <a:effectLst/>
+        </p:spPr>
+      </p:cxnSp>
+      <p:cxnSp>
+        <p:nvCxnSpPr>
+          <p:cNvPr id="28" name="C2-E15 line 26" descr="sci-ppt:o026"/>
+          <p:cNvCxnSpPr/>
+          <p:nvPr/>
+        </p:nvCxnSpPr>
+        <p:spPr>
+          <a:xfrm>
+            <a:off x="914400" y="2590800"/>
+            <a:ext cx="6035040" cy="0"/>
+          </a:xfrm>
+          <a:prstGeom prst="line">
+            <a:avLst/>
+          </a:prstGeom>
+          <a:ln w="7620">
+            <a:solidFill>
+              <a:srgbClr val="2E4756"/>
+            </a:solidFill>
+          </a:ln>
+          <a:effectLst/>
+        </p:spPr>
+      </p:cxnSp>
+      <p:sp>
+        <p:nvSpPr>
+          <p:cNvPr id="29" name="C2-E15 text 27" descr="sci-ppt:o027"/>
+          <p:cNvSpPr txBox="1"/>
+          <p:nvPr/>
+        </p:nvSpPr>
+        <p:spPr>
+          <a:xfrm>
+            <a:off x="45720" y="2508504"/>
+            <a:ext cx="777240" cy="208407"/>
+          </a:xfrm>
+          <a:prstGeom prst="rect">
+            <a:avLst/>
+          </a:prstGeom>
+          <a:noFill/>
+          <a:effectLst/>
+        </p:spPr>
+        <p:txBody>
+          <a:bodyPr wrap="none" lIns="18288" rIns="18288" tIns="18288" bIns="18288" anchor="t">
+            <a:spAutoFit/>
+          </a:bodyPr>
+          <a:lstStyle/>
+          <a:p>
+            <a:pPr algn="r">
+              <a:spcAft>
+                <a:spcPts val="0"/>
+              </a:spcAft>
+            </a:pPr>
+            <a:r>
+              <a:rPr sz="1050" b="0" i="0">
+                <a:solidFill>
+                  <a:srgbClr val="B4C7D2"/>
+                </a:solidFill>
+                <a:latin typeface="Arial"/>
+              </a:rPr>
+              <a:t>2</a:t>
+            </a:r>
+          </a:p>
+        </p:txBody>
+      </p:sp>
+      <p:cxnSp>
+        <p:nvCxnSpPr>
+          <p:cNvPr id="30" name="C2-E15 line 28" descr="sci-ppt:o028"/>
+          <p:cNvCxnSpPr/>
+          <p:nvPr/>
+        </p:nvCxnSpPr>
+        <p:spPr>
+          <a:xfrm>
+            <a:off x="850392" y="1778000"/>
+            <a:ext cx="64008" cy="0"/>
+          </a:xfrm>
+          <a:prstGeom prst="line">
+            <a:avLst/>
+          </a:prstGeom>
+          <a:ln w="12700">
+            <a:solidFill>
+              <a:srgbClr val="B4C7D2"/>
+            </a:solidFill>
+          </a:ln>
+          <a:effectLst/>
+        </p:spPr>
+      </p:cxnSp>
+      <p:cxnSp>
+        <p:nvCxnSpPr>
+          <p:cNvPr id="31" name="C2-E15 line 29" descr="sci-ppt:o029"/>
+          <p:cNvCxnSpPr/>
+          <p:nvPr/>
+        </p:nvCxnSpPr>
+        <p:spPr>
+          <a:xfrm>
+            <a:off x="914400" y="1778000"/>
+            <a:ext cx="6035040" cy="0"/>
+          </a:xfrm>
+          <a:prstGeom prst="line">
+            <a:avLst/>
+          </a:prstGeom>
+          <a:ln w="7620">
+            <a:solidFill>
+              <a:srgbClr val="2E4756"/>
+            </a:solidFill>
+          </a:ln>
+          <a:effectLst/>
+        </p:spPr>
+      </p:cxnSp>
+      <p:sp>
+        <p:nvSpPr>
+          <p:cNvPr id="32" name="C2-E15 text 30" descr="sci-ppt:o030"/>
+          <p:cNvSpPr txBox="1"/>
+          <p:nvPr/>
+        </p:nvSpPr>
+        <p:spPr>
+          <a:xfrm>
+            <a:off x="45720" y="1695704"/>
+            <a:ext cx="777240" cy="208407"/>
+          </a:xfrm>
+          <a:prstGeom prst="rect">
+            <a:avLst/>
+          </a:prstGeom>
+          <a:noFill/>
+          <a:effectLst/>
+        </p:spPr>
+        <p:txBody>
+          <a:bodyPr wrap="none" lIns="18288" rIns="18288" tIns="18288" bIns="18288" anchor="t">
+            <a:spAutoFit/>
+          </a:bodyPr>
+          <a:lstStyle/>
+          <a:p>
+            <a:pPr algn="r">
+              <a:spcAft>
+                <a:spcPts val="0"/>
+              </a:spcAft>
+            </a:pPr>
+            <a:r>
+              <a:rPr sz="1050" b="0" i="0">
+                <a:solidFill>
+                  <a:srgbClr val="B4C7D2"/>
+                </a:solidFill>
+                <a:latin typeface="Arial"/>
+              </a:rPr>
+              <a:t>4</a:t>
+            </a:r>
+          </a:p>
+        </p:txBody>
+      </p:sp>
+      <p:sp>
+        <p:nvSpPr>
+          <p:cNvPr id="33" name="C2-E15 text 31" descr="sci-ppt:o031"/>
+          <p:cNvSpPr txBox="1"/>
+          <p:nvPr/>
+        </p:nvSpPr>
+        <p:spPr>
+          <a:xfrm>
+            <a:off x="914400" y="5312664"/>
+            <a:ext cx="6035040" cy="231648"/>
+          </a:xfrm>
+          <a:prstGeom prst="rect">
+            <a:avLst/>
+          </a:prstGeom>
+          <a:noFill/>
+          <a:effectLst/>
+        </p:spPr>
+        <p:txBody>
+          <a:bodyPr wrap="none" lIns="18288" rIns="18288" tIns="18288" bIns="18288" anchor="t">
+            <a:spAutoFit/>
+          </a:bodyPr>
+          <a:lstStyle/>
+          <a:p>
+            <a:pPr algn="ctr">
+              <a:spcAft>
+                <a:spcPts val="0"/>
+              </a:spcAft>
+            </a:pPr>
+            <a:r>
+              <a:rPr sz="1200" b="0" i="0">
+                <a:solidFill>
+                  <a:srgbClr val="E7F0F3"/>
+                </a:solidFill>
+                <a:latin typeface="Arial"/>
+              </a:rPr>
+              <a:t>nucleus radius rₙ  (µm)</a:t>
+            </a:r>
+          </a:p>
+        </p:txBody>
+      </p:sp>
+      <p:sp>
+        <p:nvSpPr>
+          <p:cNvPr id="34" name="C2-E15 text 32" descr="sci-ppt:o032"/>
+          <p:cNvSpPr txBox="1"/>
+          <p:nvPr/>
+        </p:nvSpPr>
+        <p:spPr>
+          <a:xfrm>
+            <a:off x="365760" y="1024128"/>
+            <a:ext cx="6035040" cy="231648"/>
+          </a:xfrm>
+          <a:prstGeom prst="rect">
+            <a:avLst/>
+          </a:prstGeom>
+          <a:noFill/>
+          <a:effectLst/>
+        </p:spPr>
+        <p:txBody>
+          <a:bodyPr wrap="none" lIns="18288" rIns="18288" tIns="18288" bIns="18288" anchor="t">
+            <a:spAutoFit/>
+          </a:bodyPr>
+          <a:lstStyle/>
+          <a:p>
+            <a:pPr algn="l">
+              <a:spcAft>
+                <a:spcPts val="0"/>
+              </a:spcAft>
+            </a:pPr>
+            <a:r>
+              <a:rPr sz="1200" b="0" i="0">
+                <a:solidFill>
+                  <a:srgbClr val="E7F0F3"/>
+                </a:solidFill>
+                <a:latin typeface="Arial"/>
+              </a:rPr>
+              <a:t>W  (10⁻¹⁶ J)</a:t>
+            </a:r>
+          </a:p>
+        </p:txBody>
+      </p:sp>
+      <p:cxnSp>
+        <p:nvCxnSpPr>
+          <p:cNvPr id="35" name="C2-E15 line 33" descr="sci-ppt:o033"/>
+          <p:cNvCxnSpPr/>
+          <p:nvPr/>
+        </p:nvCxnSpPr>
+        <p:spPr>
+          <a:xfrm>
+            <a:off x="914400" y="3403600"/>
+            <a:ext cx="6035040" cy="0"/>
+          </a:xfrm>
+          <a:prstGeom prst="line">
+            <a:avLst/>
+          </a:prstGeom>
+          <a:ln w="15240">
+            <a:solidFill>
+              <a:srgbClr val="2E4756"/>
+            </a:solidFill>
+          </a:ln>
+          <a:effectLst/>
+        </p:spPr>
+      </p:cxnSp>
+      <p:sp>
+        <p:nvSpPr>
+          <p:cNvPr id="36" name="C2-E15 polygon 34" descr="sci-ppt:o034"/>
           <p:cNvSpPr/>
           <p:nvPr/>
         </p:nvSpPr>
         <p:spPr>
           <a:xfrm>
-            <a:off x="1341120" y="1280160"/>
-            <a:ext cx="2804160" cy="2804160"/>
+            <a:off x="914400" y="1701277"/>
+            <a:ext cx="4561602" cy="3235703"/>
+          </a:xfrm>
+          <a:custGeom>
+            <a:avLst/>
+            <a:gdLst/>
+            <a:ahLst/>
+            <a:cxnLst/>
+            <a:rect l="l" t="t" r="r" b="b"/>
+            <a:pathLst>
+              <a:path w="4561602" h="3235703">
+                <a:moveTo>
+                  <a:pt x="0" y="1702323"/>
+                </a:moveTo>
+                <a:lnTo>
+                  <a:pt x="40368" y="1701227"/>
+                </a:lnTo>
+                <a:lnTo>
+                  <a:pt x="80736" y="1697986"/>
+                </a:lnTo>
+                <a:lnTo>
+                  <a:pt x="121104" y="1692662"/>
+                </a:lnTo>
+                <a:lnTo>
+                  <a:pt x="161472" y="1685322"/>
+                </a:lnTo>
+                <a:lnTo>
+                  <a:pt x="201840" y="1676031"/>
+                </a:lnTo>
+                <a:lnTo>
+                  <a:pt x="242208" y="1664853"/>
+                </a:lnTo>
+                <a:lnTo>
+                  <a:pt x="282577" y="1651854"/>
+                </a:lnTo>
+                <a:lnTo>
+                  <a:pt x="322945" y="1637098"/>
+                </a:lnTo>
+                <a:lnTo>
+                  <a:pt x="363313" y="1620652"/>
+                </a:lnTo>
+                <a:lnTo>
+                  <a:pt x="403681" y="1602579"/>
+                </a:lnTo>
+                <a:lnTo>
+                  <a:pt x="444049" y="1582946"/>
+                </a:lnTo>
+                <a:lnTo>
+                  <a:pt x="484417" y="1561817"/>
+                </a:lnTo>
+                <a:lnTo>
+                  <a:pt x="524786" y="1539258"/>
+                </a:lnTo>
+                <a:lnTo>
+                  <a:pt x="565154" y="1515332"/>
+                </a:lnTo>
+                <a:lnTo>
+                  <a:pt x="605522" y="1490107"/>
+                </a:lnTo>
+                <a:lnTo>
+                  <a:pt x="645890" y="1463645"/>
+                </a:lnTo>
+                <a:lnTo>
+                  <a:pt x="686258" y="1436014"/>
+                </a:lnTo>
+                <a:lnTo>
+                  <a:pt x="726626" y="1407277"/>
+                </a:lnTo>
+                <a:lnTo>
+                  <a:pt x="766995" y="1377501"/>
+                </a:lnTo>
+                <a:lnTo>
+                  <a:pt x="807363" y="1346749"/>
+                </a:lnTo>
+                <a:lnTo>
+                  <a:pt x="847731" y="1315087"/>
+                </a:lnTo>
+                <a:lnTo>
+                  <a:pt x="888099" y="1282581"/>
+                </a:lnTo>
+                <a:lnTo>
+                  <a:pt x="928467" y="1249295"/>
+                </a:lnTo>
+                <a:lnTo>
+                  <a:pt x="968835" y="1215294"/>
+                </a:lnTo>
+                <a:lnTo>
+                  <a:pt x="1009204" y="1180644"/>
+                </a:lnTo>
+                <a:lnTo>
+                  <a:pt x="1049572" y="1145410"/>
+                </a:lnTo>
+                <a:lnTo>
+                  <a:pt x="1089940" y="1109656"/>
+                </a:lnTo>
+                <a:lnTo>
+                  <a:pt x="1130308" y="1073448"/>
+                </a:lnTo>
+                <a:lnTo>
+                  <a:pt x="1170676" y="1036850"/>
+                </a:lnTo>
+                <a:lnTo>
+                  <a:pt x="1211044" y="999929"/>
+                </a:lnTo>
+                <a:lnTo>
+                  <a:pt x="1251412" y="962749"/>
+                </a:lnTo>
+                <a:lnTo>
+                  <a:pt x="1291781" y="925375"/>
+                </a:lnTo>
+                <a:lnTo>
+                  <a:pt x="1332149" y="887873"/>
+                </a:lnTo>
+                <a:lnTo>
+                  <a:pt x="1372517" y="850306"/>
+                </a:lnTo>
+                <a:lnTo>
+                  <a:pt x="1412885" y="812742"/>
+                </a:lnTo>
+                <a:lnTo>
+                  <a:pt x="1453253" y="775243"/>
+                </a:lnTo>
+                <a:lnTo>
+                  <a:pt x="1493621" y="737877"/>
+                </a:lnTo>
+                <a:lnTo>
+                  <a:pt x="1533990" y="700707"/>
+                </a:lnTo>
+                <a:lnTo>
+                  <a:pt x="1574358" y="663799"/>
+                </a:lnTo>
+                <a:lnTo>
+                  <a:pt x="1614726" y="627218"/>
+                </a:lnTo>
+                <a:lnTo>
+                  <a:pt x="1655094" y="591029"/>
+                </a:lnTo>
+                <a:lnTo>
+                  <a:pt x="1695462" y="555298"/>
+                </a:lnTo>
+                <a:lnTo>
+                  <a:pt x="1735830" y="520088"/>
+                </a:lnTo>
+                <a:lnTo>
+                  <a:pt x="1776199" y="485466"/>
+                </a:lnTo>
+                <a:lnTo>
+                  <a:pt x="1816567" y="451497"/>
+                </a:lnTo>
+                <a:lnTo>
+                  <a:pt x="1856935" y="418245"/>
+                </a:lnTo>
+                <a:lnTo>
+                  <a:pt x="1897303" y="385775"/>
+                </a:lnTo>
+                <a:lnTo>
+                  <a:pt x="1937671" y="354154"/>
+                </a:lnTo>
+                <a:lnTo>
+                  <a:pt x="1978039" y="323445"/>
+                </a:lnTo>
+                <a:lnTo>
+                  <a:pt x="2018408" y="293714"/>
+                </a:lnTo>
+                <a:lnTo>
+                  <a:pt x="2058776" y="265026"/>
+                </a:lnTo>
+                <a:lnTo>
+                  <a:pt x="2099144" y="237447"/>
+                </a:lnTo>
+                <a:lnTo>
+                  <a:pt x="2139512" y="211040"/>
+                </a:lnTo>
+                <a:lnTo>
+                  <a:pt x="2179880" y="185872"/>
+                </a:lnTo>
+                <a:lnTo>
+                  <a:pt x="2220248" y="162008"/>
+                </a:lnTo>
+                <a:lnTo>
+                  <a:pt x="2260616" y="139511"/>
+                </a:lnTo>
+                <a:lnTo>
+                  <a:pt x="2300985" y="118449"/>
+                </a:lnTo>
+                <a:lnTo>
+                  <a:pt x="2341353" y="98885"/>
+                </a:lnTo>
+                <a:lnTo>
+                  <a:pt x="2381721" y="80886"/>
+                </a:lnTo>
+                <a:lnTo>
+                  <a:pt x="2422089" y="64515"/>
+                </a:lnTo>
+                <a:lnTo>
+                  <a:pt x="2462457" y="49838"/>
+                </a:lnTo>
+                <a:lnTo>
+                  <a:pt x="2502825" y="36920"/>
+                </a:lnTo>
+                <a:lnTo>
+                  <a:pt x="2543194" y="25826"/>
+                </a:lnTo>
+                <a:lnTo>
+                  <a:pt x="2583562" y="16622"/>
+                </a:lnTo>
+                <a:lnTo>
+                  <a:pt x="2623930" y="9372"/>
+                </a:lnTo>
+                <a:lnTo>
+                  <a:pt x="2664298" y="4142"/>
+                </a:lnTo>
+                <a:lnTo>
+                  <a:pt x="2704666" y="996"/>
+                </a:lnTo>
+                <a:lnTo>
+                  <a:pt x="2745034" y="0"/>
+                </a:lnTo>
+                <a:lnTo>
+                  <a:pt x="2785403" y="1219"/>
+                </a:lnTo>
+                <a:lnTo>
+                  <a:pt x="2825771" y="4718"/>
+                </a:lnTo>
+                <a:lnTo>
+                  <a:pt x="2866139" y="10562"/>
+                </a:lnTo>
+                <a:lnTo>
+                  <a:pt x="2906507" y="18816"/>
+                </a:lnTo>
+                <a:lnTo>
+                  <a:pt x="2946875" y="29545"/>
+                </a:lnTo>
+                <a:lnTo>
+                  <a:pt x="2987243" y="42814"/>
+                </a:lnTo>
+                <a:lnTo>
+                  <a:pt x="3027612" y="58689"/>
+                </a:lnTo>
+                <a:lnTo>
+                  <a:pt x="3067980" y="77234"/>
+                </a:lnTo>
+                <a:lnTo>
+                  <a:pt x="3108348" y="98515"/>
+                </a:lnTo>
+                <a:lnTo>
+                  <a:pt x="3148716" y="122597"/>
+                </a:lnTo>
+                <a:lnTo>
+                  <a:pt x="3189084" y="149544"/>
+                </a:lnTo>
+                <a:lnTo>
+                  <a:pt x="3229452" y="179423"/>
+                </a:lnTo>
+                <a:lnTo>
+                  <a:pt x="3269821" y="212297"/>
+                </a:lnTo>
+                <a:lnTo>
+                  <a:pt x="3310189" y="248232"/>
+                </a:lnTo>
+                <a:lnTo>
+                  <a:pt x="3350557" y="287294"/>
+                </a:lnTo>
+                <a:lnTo>
+                  <a:pt x="3390925" y="329547"/>
+                </a:lnTo>
+                <a:lnTo>
+                  <a:pt x="3431293" y="375056"/>
+                </a:lnTo>
+                <a:lnTo>
+                  <a:pt x="3471661" y="423886"/>
+                </a:lnTo>
+                <a:lnTo>
+                  <a:pt x="3512029" y="476104"/>
+                </a:lnTo>
+                <a:lnTo>
+                  <a:pt x="3552398" y="531773"/>
+                </a:lnTo>
+                <a:lnTo>
+                  <a:pt x="3592766" y="590958"/>
+                </a:lnTo>
+                <a:lnTo>
+                  <a:pt x="3633134" y="653726"/>
+                </a:lnTo>
+                <a:lnTo>
+                  <a:pt x="3673502" y="720141"/>
+                </a:lnTo>
+                <a:lnTo>
+                  <a:pt x="3713870" y="790267"/>
+                </a:lnTo>
+                <a:lnTo>
+                  <a:pt x="3754238" y="864171"/>
+                </a:lnTo>
+                <a:lnTo>
+                  <a:pt x="3794607" y="941917"/>
+                </a:lnTo>
+                <a:lnTo>
+                  <a:pt x="3834975" y="1023570"/>
+                </a:lnTo>
+                <a:lnTo>
+                  <a:pt x="3875343" y="1109196"/>
+                </a:lnTo>
+                <a:lnTo>
+                  <a:pt x="3915711" y="1198860"/>
+                </a:lnTo>
+                <a:lnTo>
+                  <a:pt x="3956079" y="1292626"/>
+                </a:lnTo>
+                <a:lnTo>
+                  <a:pt x="3996447" y="1390560"/>
+                </a:lnTo>
+                <a:lnTo>
+                  <a:pt x="4036816" y="1492726"/>
+                </a:lnTo>
+                <a:lnTo>
+                  <a:pt x="4077184" y="1599191"/>
+                </a:lnTo>
+                <a:lnTo>
+                  <a:pt x="4117552" y="1710019"/>
+                </a:lnTo>
+                <a:lnTo>
+                  <a:pt x="4157920" y="1825275"/>
+                </a:lnTo>
+                <a:lnTo>
+                  <a:pt x="4198288" y="1945024"/>
+                </a:lnTo>
+                <a:lnTo>
+                  <a:pt x="4238656" y="2069331"/>
+                </a:lnTo>
+                <a:lnTo>
+                  <a:pt x="4279025" y="2198262"/>
+                </a:lnTo>
+                <a:lnTo>
+                  <a:pt x="4319393" y="2331882"/>
+                </a:lnTo>
+                <a:lnTo>
+                  <a:pt x="4359761" y="2470255"/>
+                </a:lnTo>
+                <a:lnTo>
+                  <a:pt x="4400129" y="2613446"/>
+                </a:lnTo>
+                <a:lnTo>
+                  <a:pt x="4440497" y="2761522"/>
+                </a:lnTo>
+                <a:lnTo>
+                  <a:pt x="4480865" y="2914547"/>
+                </a:lnTo>
+                <a:lnTo>
+                  <a:pt x="4521233" y="3072585"/>
+                </a:lnTo>
+                <a:lnTo>
+                  <a:pt x="4561602" y="3235703"/>
+                </a:lnTo>
+              </a:path>
+            </a:pathLst>
+          </a:custGeom>
+          <a:noFill/>
+          <a:ln w="38100">
+            <a:solidFill>
+              <a:srgbClr val="8EDBD4"/>
+            </a:solidFill>
+          </a:ln>
+          <a:effectLst/>
+        </p:spPr>
+        <p:txBody>
+          <a:bodyPr rtlCol="0" anchor="ctr"/>
+          <a:lstStyle/>
+          <a:p>
+            <a:pPr algn="ctr"/>
+          </a:p>
+        </p:txBody>
+      </p:sp>
+      <p:sp>
+        <p:nvSpPr>
+          <p:cNvPr id="37" name="C2-E15 ellipse 35" descr="sci-ppt:o035"/>
+          <p:cNvSpPr/>
+          <p:nvPr/>
+        </p:nvSpPr>
+        <p:spPr>
+          <a:xfrm>
+            <a:off x="3584447" y="1628123"/>
+            <a:ext cx="146304" cy="146304"/>
           </a:xfrm>
           <a:prstGeom prst="ellipse">
+            <a:avLst/>
+          </a:prstGeom>
+          <a:solidFill>
+            <a:srgbClr val="8EDBD4"/>
+          </a:solidFill>
+          <a:ln w="12700">
+            <a:solidFill>
+              <a:srgbClr val="8EDBD4"/>
+            </a:solidFill>
+          </a:ln>
+          <a:effectLst/>
+        </p:spPr>
+        <p:txBody>
+          <a:bodyPr rtlCol="0" anchor="ctr"/>
+          <a:lstStyle/>
+          <a:p>
+            <a:pPr algn="ctr"/>
+          </a:p>
+        </p:txBody>
+      </p:sp>
+      <p:sp>
+        <p:nvSpPr>
+          <p:cNvPr id="38" name="C2-E15 polygon 36" descr="sci-ppt:o036"/>
+          <p:cNvSpPr/>
+          <p:nvPr/>
+        </p:nvSpPr>
+        <p:spPr>
+          <a:xfrm>
+            <a:off x="914400" y="2978019"/>
+            <a:ext cx="2704666" cy="1987435"/>
+          </a:xfrm>
+          <a:custGeom>
+            <a:avLst/>
+            <a:gdLst/>
+            <a:ahLst/>
+            <a:cxnLst/>
+            <a:rect l="l" t="t" r="r" b="b"/>
+            <a:pathLst>
+              <a:path w="2704666" h="1987435">
+                <a:moveTo>
+                  <a:pt x="0" y="425581"/>
+                </a:moveTo>
+                <a:lnTo>
+                  <a:pt x="40368" y="424496"/>
+                </a:lnTo>
+                <a:lnTo>
+                  <a:pt x="80736" y="421330"/>
+                </a:lnTo>
+                <a:lnTo>
+                  <a:pt x="121104" y="416213"/>
+                </a:lnTo>
+                <a:lnTo>
+                  <a:pt x="161472" y="409274"/>
+                </a:lnTo>
+                <a:lnTo>
+                  <a:pt x="201840" y="400645"/>
+                </a:lnTo>
+                <a:lnTo>
+                  <a:pt x="242208" y="390454"/>
+                </a:lnTo>
+                <a:lnTo>
+                  <a:pt x="282577" y="378833"/>
+                </a:lnTo>
+                <a:lnTo>
+                  <a:pt x="322945" y="365911"/>
+                </a:lnTo>
+                <a:lnTo>
+                  <a:pt x="363313" y="351819"/>
+                </a:lnTo>
+                <a:lnTo>
+                  <a:pt x="403681" y="336687"/>
+                </a:lnTo>
+                <a:lnTo>
+                  <a:pt x="444049" y="320645"/>
+                </a:lnTo>
+                <a:lnTo>
+                  <a:pt x="484417" y="303823"/>
+                </a:lnTo>
+                <a:lnTo>
+                  <a:pt x="524786" y="286352"/>
+                </a:lnTo>
+                <a:lnTo>
+                  <a:pt x="565154" y="268362"/>
+                </a:lnTo>
+                <a:lnTo>
+                  <a:pt x="605522" y="249982"/>
+                </a:lnTo>
+                <a:lnTo>
+                  <a:pt x="645890" y="231344"/>
+                </a:lnTo>
+                <a:lnTo>
+                  <a:pt x="686258" y="212576"/>
+                </a:lnTo>
+                <a:lnTo>
+                  <a:pt x="726626" y="193811"/>
+                </a:lnTo>
+                <a:lnTo>
+                  <a:pt x="766995" y="175177"/>
+                </a:lnTo>
+                <a:lnTo>
+                  <a:pt x="807363" y="156804"/>
+                </a:lnTo>
+                <a:lnTo>
+                  <a:pt x="847731" y="138824"/>
+                </a:lnTo>
+                <a:lnTo>
+                  <a:pt x="888099" y="121366"/>
+                </a:lnTo>
+                <a:lnTo>
+                  <a:pt x="928467" y="104561"/>
+                </a:lnTo>
+                <a:lnTo>
+                  <a:pt x="968835" y="88538"/>
+                </a:lnTo>
+                <a:lnTo>
+                  <a:pt x="1009204" y="73428"/>
+                </a:lnTo>
+                <a:lnTo>
+                  <a:pt x="1049572" y="59362"/>
+                </a:lnTo>
+                <a:lnTo>
+                  <a:pt x="1089940" y="46468"/>
+                </a:lnTo>
+                <a:lnTo>
+                  <a:pt x="1130308" y="34878"/>
+                </a:lnTo>
+                <a:lnTo>
+                  <a:pt x="1170676" y="24721"/>
+                </a:lnTo>
+                <a:lnTo>
+                  <a:pt x="1211044" y="16129"/>
+                </a:lnTo>
+                <a:lnTo>
+                  <a:pt x="1251412" y="9230"/>
+                </a:lnTo>
+                <a:lnTo>
+                  <a:pt x="1291781" y="4155"/>
+                </a:lnTo>
+                <a:lnTo>
+                  <a:pt x="1332149" y="1035"/>
+                </a:lnTo>
+                <a:lnTo>
+                  <a:pt x="1372517" y="0"/>
+                </a:lnTo>
+                <a:lnTo>
+                  <a:pt x="1412885" y="1179"/>
+                </a:lnTo>
+                <a:lnTo>
+                  <a:pt x="1453253" y="4704"/>
+                </a:lnTo>
+                <a:lnTo>
+                  <a:pt x="1493621" y="10703"/>
+                </a:lnTo>
+                <a:lnTo>
+                  <a:pt x="1533990" y="19308"/>
+                </a:lnTo>
+                <a:lnTo>
+                  <a:pt x="1574358" y="30649"/>
+                </a:lnTo>
+                <a:lnTo>
+                  <a:pt x="1614726" y="44856"/>
+                </a:lnTo>
+                <a:lnTo>
+                  <a:pt x="1655094" y="62058"/>
+                </a:lnTo>
+                <a:lnTo>
+                  <a:pt x="1695462" y="82387"/>
+                </a:lnTo>
+                <a:lnTo>
+                  <a:pt x="1735830" y="105971"/>
+                </a:lnTo>
+                <a:lnTo>
+                  <a:pt x="1776199" y="132943"/>
+                </a:lnTo>
+                <a:lnTo>
+                  <a:pt x="1816567" y="163431"/>
+                </a:lnTo>
+                <a:lnTo>
+                  <a:pt x="1856935" y="197567"/>
+                </a:lnTo>
+                <a:lnTo>
+                  <a:pt x="1897303" y="235479"/>
+                </a:lnTo>
+                <a:lnTo>
+                  <a:pt x="1937671" y="277299"/>
+                </a:lnTo>
+                <a:lnTo>
+                  <a:pt x="1978039" y="323156"/>
+                </a:lnTo>
+                <a:lnTo>
+                  <a:pt x="2018408" y="373181"/>
+                </a:lnTo>
+                <a:lnTo>
+                  <a:pt x="2058776" y="427505"/>
+                </a:lnTo>
+                <a:lnTo>
+                  <a:pt x="2099144" y="486256"/>
+                </a:lnTo>
+                <a:lnTo>
+                  <a:pt x="2139512" y="549565"/>
+                </a:lnTo>
+                <a:lnTo>
+                  <a:pt x="2179880" y="617564"/>
+                </a:lnTo>
+                <a:lnTo>
+                  <a:pt x="2220248" y="690380"/>
+                </a:lnTo>
+                <a:lnTo>
+                  <a:pt x="2260616" y="768146"/>
+                </a:lnTo>
+                <a:lnTo>
+                  <a:pt x="2300985" y="850991"/>
+                </a:lnTo>
+                <a:lnTo>
+                  <a:pt x="2341353" y="939045"/>
+                </a:lnTo>
+                <a:lnTo>
+                  <a:pt x="2381721" y="1032439"/>
+                </a:lnTo>
+                <a:lnTo>
+                  <a:pt x="2422089" y="1131303"/>
+                </a:lnTo>
+                <a:lnTo>
+                  <a:pt x="2462457" y="1235766"/>
+                </a:lnTo>
+                <a:lnTo>
+                  <a:pt x="2502825" y="1345960"/>
+                </a:lnTo>
+                <a:lnTo>
+                  <a:pt x="2543194" y="1462013"/>
+                </a:lnTo>
+                <a:lnTo>
+                  <a:pt x="2583562" y="1584058"/>
+                </a:lnTo>
+                <a:lnTo>
+                  <a:pt x="2623930" y="1712223"/>
+                </a:lnTo>
+                <a:lnTo>
+                  <a:pt x="2664298" y="1846639"/>
+                </a:lnTo>
+                <a:lnTo>
+                  <a:pt x="2704666" y="1987435"/>
+                </a:lnTo>
+              </a:path>
+            </a:pathLst>
+          </a:custGeom>
+          <a:noFill/>
+          <a:ln w="38100">
+            <a:solidFill>
+              <a:srgbClr val="F2B880"/>
+            </a:solidFill>
+          </a:ln>
+          <a:effectLst/>
+        </p:spPr>
+        <p:txBody>
+          <a:bodyPr rtlCol="0" anchor="ctr"/>
+          <a:lstStyle/>
+          <a:p>
+            <a:pPr algn="ctr"/>
+          </a:p>
+        </p:txBody>
+      </p:sp>
+      <p:sp>
+        <p:nvSpPr>
+          <p:cNvPr id="39" name="C2-E15 ellipse 37" descr="sci-ppt:o037"/>
+          <p:cNvSpPr/>
+          <p:nvPr/>
+        </p:nvSpPr>
+        <p:spPr>
+          <a:xfrm>
+            <a:off x="2212848" y="2904866"/>
+            <a:ext cx="146304" cy="146304"/>
+          </a:xfrm>
+          <a:prstGeom prst="ellipse">
+            <a:avLst/>
+          </a:prstGeom>
+          <a:solidFill>
+            <a:srgbClr val="F2B880"/>
+          </a:solidFill>
+          <a:ln w="12700">
+            <a:solidFill>
+              <a:srgbClr val="F2B880"/>
+            </a:solidFill>
+          </a:ln>
+          <a:effectLst/>
+        </p:spPr>
+        <p:txBody>
+          <a:bodyPr rtlCol="0" anchor="ctr"/>
+          <a:lstStyle/>
+          <a:p>
+            <a:pPr algn="ctr"/>
+          </a:p>
+        </p:txBody>
+      </p:sp>
+      <p:sp>
+        <p:nvSpPr>
+          <p:cNvPr id="40" name="C2-E15 polygon 38" descr="sci-ppt:o038"/>
+          <p:cNvSpPr/>
+          <p:nvPr/>
+        </p:nvSpPr>
+        <p:spPr>
+          <a:xfrm>
+            <a:off x="914400" y="3297204"/>
+            <a:ext cx="1776199" cy="1662196"/>
+          </a:xfrm>
+          <a:custGeom>
+            <a:avLst/>
+            <a:gdLst/>
+            <a:ahLst/>
+            <a:cxnLst/>
+            <a:rect l="l" t="t" r="r" b="b"/>
+            <a:pathLst>
+              <a:path w="1776199" h="1662196">
+                <a:moveTo>
+                  <a:pt x="0" y="106396"/>
+                </a:moveTo>
+                <a:lnTo>
+                  <a:pt x="40368" y="105333"/>
+                </a:lnTo>
+                <a:lnTo>
+                  <a:pt x="80736" y="102319"/>
+                </a:lnTo>
+                <a:lnTo>
+                  <a:pt x="121104" y="97614"/>
+                </a:lnTo>
+                <a:lnTo>
+                  <a:pt x="161472" y="91478"/>
+                </a:lnTo>
+                <a:lnTo>
+                  <a:pt x="201840" y="84172"/>
+                </a:lnTo>
+                <a:lnTo>
+                  <a:pt x="242208" y="75956"/>
+                </a:lnTo>
+                <a:lnTo>
+                  <a:pt x="282577" y="67091"/>
+                </a:lnTo>
+                <a:lnTo>
+                  <a:pt x="322945" y="57836"/>
+                </a:lnTo>
+                <a:lnTo>
+                  <a:pt x="363313" y="48453"/>
+                </a:lnTo>
+                <a:lnTo>
+                  <a:pt x="403681" y="39201"/>
+                </a:lnTo>
+                <a:lnTo>
+                  <a:pt x="444049" y="30342"/>
+                </a:lnTo>
+                <a:lnTo>
+                  <a:pt x="484417" y="22135"/>
+                </a:lnTo>
+                <a:lnTo>
+                  <a:pt x="524786" y="14841"/>
+                </a:lnTo>
+                <a:lnTo>
+                  <a:pt x="565154" y="8720"/>
+                </a:lnTo>
+                <a:lnTo>
+                  <a:pt x="605522" y="4033"/>
+                </a:lnTo>
+                <a:lnTo>
+                  <a:pt x="645890" y="1039"/>
+                </a:lnTo>
+                <a:lnTo>
+                  <a:pt x="686258" y="0"/>
+                </a:lnTo>
+                <a:lnTo>
+                  <a:pt x="726626" y="1176"/>
+                </a:lnTo>
+                <a:lnTo>
+                  <a:pt x="766995" y="4827"/>
+                </a:lnTo>
+                <a:lnTo>
+                  <a:pt x="807363" y="11214"/>
+                </a:lnTo>
+                <a:lnTo>
+                  <a:pt x="847731" y="20597"/>
+                </a:lnTo>
+                <a:lnTo>
+                  <a:pt x="888099" y="33236"/>
+                </a:lnTo>
+                <a:lnTo>
+                  <a:pt x="928467" y="49392"/>
+                </a:lnTo>
+                <a:lnTo>
+                  <a:pt x="968835" y="69325"/>
+                </a:lnTo>
+                <a:lnTo>
+                  <a:pt x="1009204" y="93296"/>
+                </a:lnTo>
+                <a:lnTo>
+                  <a:pt x="1049572" y="121564"/>
+                </a:lnTo>
+                <a:lnTo>
+                  <a:pt x="1089940" y="154391"/>
+                </a:lnTo>
+                <a:lnTo>
+                  <a:pt x="1130308" y="192037"/>
+                </a:lnTo>
+                <a:lnTo>
+                  <a:pt x="1170676" y="234762"/>
+                </a:lnTo>
+                <a:lnTo>
+                  <a:pt x="1211044" y="282826"/>
+                </a:lnTo>
+                <a:lnTo>
+                  <a:pt x="1251412" y="336490"/>
+                </a:lnTo>
+                <a:lnTo>
+                  <a:pt x="1291781" y="396015"/>
+                </a:lnTo>
+                <a:lnTo>
+                  <a:pt x="1332149" y="461660"/>
+                </a:lnTo>
+                <a:lnTo>
+                  <a:pt x="1372517" y="533686"/>
+                </a:lnTo>
+                <a:lnTo>
+                  <a:pt x="1412885" y="612354"/>
+                </a:lnTo>
+                <a:lnTo>
+                  <a:pt x="1453253" y="697924"/>
+                </a:lnTo>
+                <a:lnTo>
+                  <a:pt x="1493621" y="790656"/>
+                </a:lnTo>
+                <a:lnTo>
+                  <a:pt x="1533990" y="890810"/>
+                </a:lnTo>
+                <a:lnTo>
+                  <a:pt x="1574358" y="998648"/>
+                </a:lnTo>
+                <a:lnTo>
+                  <a:pt x="1614726" y="1114429"/>
+                </a:lnTo>
+                <a:lnTo>
+                  <a:pt x="1655094" y="1238414"/>
+                </a:lnTo>
+                <a:lnTo>
+                  <a:pt x="1695462" y="1370863"/>
+                </a:lnTo>
+                <a:lnTo>
+                  <a:pt x="1735830" y="1512037"/>
+                </a:lnTo>
+                <a:lnTo>
+                  <a:pt x="1776199" y="1662196"/>
+                </a:lnTo>
+              </a:path>
+            </a:pathLst>
+          </a:custGeom>
+          <a:noFill/>
+          <a:ln w="38100">
+            <a:solidFill>
+              <a:srgbClr val="F28BA0"/>
+            </a:solidFill>
+          </a:ln>
+          <a:effectLst/>
+        </p:spPr>
+        <p:txBody>
+          <a:bodyPr rtlCol="0" anchor="ctr"/>
+          <a:lstStyle/>
+          <a:p>
+            <a:pPr algn="ctr"/>
+          </a:p>
+        </p:txBody>
+      </p:sp>
+      <p:sp>
+        <p:nvSpPr>
+          <p:cNvPr id="41" name="C2-E15 ellipse 39" descr="sci-ppt:o039"/>
+          <p:cNvSpPr/>
+          <p:nvPr/>
+        </p:nvSpPr>
+        <p:spPr>
+          <a:xfrm>
+            <a:off x="1527048" y="3224052"/>
+            <a:ext cx="146304" cy="146304"/>
+          </a:xfrm>
+          <a:prstGeom prst="ellipse">
+            <a:avLst/>
+          </a:prstGeom>
+          <a:solidFill>
+            <a:srgbClr val="F28BA0"/>
+          </a:solidFill>
+          <a:ln w="12700">
+            <a:solidFill>
+              <a:srgbClr val="F28BA0"/>
+            </a:solidFill>
+          </a:ln>
+          <a:effectLst/>
+        </p:spPr>
+        <p:txBody>
+          <a:bodyPr rtlCol="0" anchor="ctr"/>
+          <a:lstStyle/>
+          <a:p>
+            <a:pPr algn="ctr"/>
+          </a:p>
+        </p:txBody>
+      </p:sp>
+      <p:sp>
+        <p:nvSpPr>
+          <p:cNvPr id="42" name="C2-E15 rect 40" descr="sci-ppt:o040"/>
+          <p:cNvSpPr/>
+          <p:nvPr/>
+        </p:nvSpPr>
+        <p:spPr>
+          <a:xfrm>
+            <a:off x="4572000" y="1600200"/>
+            <a:ext cx="274320" cy="182880"/>
+          </a:xfrm>
+          <a:prstGeom prst="rect">
+            <a:avLst/>
+          </a:prstGeom>
+          <a:solidFill>
+            <a:srgbClr val="8EDBD4"/>
+          </a:solidFill>
+          <a:ln w="12700">
+            <a:solidFill>
+              <a:srgbClr val="8EDBD4"/>
+            </a:solidFill>
+          </a:ln>
+          <a:effectLst/>
+        </p:spPr>
+        <p:txBody>
+          <a:bodyPr rtlCol="0" anchor="ctr"/>
+          <a:lstStyle/>
+          <a:p>
+            <a:pPr algn="ctr"/>
+          </a:p>
+        </p:txBody>
+      </p:sp>
+      <p:sp>
+        <p:nvSpPr>
+          <p:cNvPr id="43" name="C2-E15 text 41" descr="sci-ppt:o041"/>
+          <p:cNvSpPr txBox="1"/>
+          <p:nvPr/>
+        </p:nvSpPr>
+        <p:spPr>
+          <a:xfrm>
+            <a:off x="4956048" y="1554480"/>
+            <a:ext cx="2011680" cy="223900"/>
+          </a:xfrm>
+          <a:prstGeom prst="rect">
+            <a:avLst/>
+          </a:prstGeom>
+          <a:noFill/>
+          <a:effectLst/>
+        </p:spPr>
+        <p:txBody>
+          <a:bodyPr wrap="none" lIns="18288" rIns="18288" tIns="18288" bIns="18288" anchor="t">
+            <a:spAutoFit/>
+          </a:bodyPr>
+          <a:lstStyle/>
+          <a:p>
+            <a:pPr algn="l">
+              <a:spcAft>
+                <a:spcPts val="0"/>
+              </a:spcAft>
+            </a:pPr>
+            <a:r>
+              <a:rPr sz="1150" b="0" i="0">
+                <a:solidFill>
+                  <a:srgbClr val="8EDBD4"/>
+                </a:solidFill>
+                <a:latin typeface="Arial"/>
+              </a:rPr>
+              <a:t>Δp = 2 bar: r* = 0.100 µm</a:t>
+            </a:r>
+          </a:p>
+        </p:txBody>
+      </p:sp>
+      <p:sp>
+        <p:nvSpPr>
+          <p:cNvPr id="44" name="C2-E15 rect 42" descr="sci-ppt:o042"/>
+          <p:cNvSpPr/>
+          <p:nvPr/>
+        </p:nvSpPr>
+        <p:spPr>
+          <a:xfrm>
+            <a:off x="4572000" y="1947672"/>
+            <a:ext cx="274320" cy="182880"/>
+          </a:xfrm>
+          <a:prstGeom prst="rect">
+            <a:avLst/>
+          </a:prstGeom>
+          <a:solidFill>
+            <a:srgbClr val="F2B880"/>
+          </a:solidFill>
+          <a:ln w="12700">
+            <a:solidFill>
+              <a:srgbClr val="F2B880"/>
+            </a:solidFill>
+          </a:ln>
+          <a:effectLst/>
+        </p:spPr>
+        <p:txBody>
+          <a:bodyPr rtlCol="0" anchor="ctr"/>
+          <a:lstStyle/>
+          <a:p>
+            <a:pPr algn="ctr"/>
+          </a:p>
+        </p:txBody>
+      </p:sp>
+      <p:sp>
+        <p:nvSpPr>
+          <p:cNvPr id="45" name="C2-E15 text 43" descr="sci-ppt:o043"/>
+          <p:cNvSpPr txBox="1"/>
+          <p:nvPr/>
+        </p:nvSpPr>
+        <p:spPr>
+          <a:xfrm>
+            <a:off x="4956048" y="1901952"/>
+            <a:ext cx="2011680" cy="223900"/>
+          </a:xfrm>
+          <a:prstGeom prst="rect">
+            <a:avLst/>
+          </a:prstGeom>
+          <a:noFill/>
+          <a:effectLst/>
+        </p:spPr>
+        <p:txBody>
+          <a:bodyPr wrap="none" lIns="18288" rIns="18288" tIns="18288" bIns="18288" anchor="t">
+            <a:spAutoFit/>
+          </a:bodyPr>
+          <a:lstStyle/>
+          <a:p>
+            <a:pPr algn="l">
+              <a:spcAft>
+                <a:spcPts val="0"/>
+              </a:spcAft>
+            </a:pPr>
+            <a:r>
+              <a:rPr sz="1150" b="0" i="0">
+                <a:solidFill>
+                  <a:srgbClr val="F2B880"/>
+                </a:solidFill>
+                <a:latin typeface="Arial"/>
+              </a:rPr>
+              <a:t>Δp = 4 bar: r* = 0.050 µm</a:t>
+            </a:r>
+          </a:p>
+        </p:txBody>
+      </p:sp>
+      <p:sp>
+        <p:nvSpPr>
+          <p:cNvPr id="46" name="C2-E15 rect 44" descr="sci-ppt:o044"/>
+          <p:cNvSpPr/>
+          <p:nvPr/>
+        </p:nvSpPr>
+        <p:spPr>
+          <a:xfrm>
+            <a:off x="4572000" y="2295144"/>
+            <a:ext cx="274320" cy="182880"/>
+          </a:xfrm>
+          <a:prstGeom prst="rect">
+            <a:avLst/>
+          </a:prstGeom>
+          <a:solidFill>
+            <a:srgbClr val="F28BA0"/>
+          </a:solidFill>
+          <a:ln w="12700">
+            <a:solidFill>
+              <a:srgbClr val="F28BA0"/>
+            </a:solidFill>
+          </a:ln>
+          <a:effectLst/>
+        </p:spPr>
+        <p:txBody>
+          <a:bodyPr rtlCol="0" anchor="ctr"/>
+          <a:lstStyle/>
+          <a:p>
+            <a:pPr algn="ctr"/>
+          </a:p>
+        </p:txBody>
+      </p:sp>
+      <p:sp>
+        <p:nvSpPr>
+          <p:cNvPr id="47" name="C2-E15 text 45" descr="sci-ppt:o045"/>
+          <p:cNvSpPr txBox="1"/>
+          <p:nvPr/>
+        </p:nvSpPr>
+        <p:spPr>
+          <a:xfrm>
+            <a:off x="4956048" y="2249424"/>
+            <a:ext cx="2011680" cy="223900"/>
+          </a:xfrm>
+          <a:prstGeom prst="rect">
+            <a:avLst/>
+          </a:prstGeom>
+          <a:noFill/>
+          <a:effectLst/>
+        </p:spPr>
+        <p:txBody>
+          <a:bodyPr wrap="none" lIns="18288" rIns="18288" tIns="18288" bIns="18288" anchor="t">
+            <a:spAutoFit/>
+          </a:bodyPr>
+          <a:lstStyle/>
+          <a:p>
+            <a:pPr algn="l">
+              <a:spcAft>
+                <a:spcPts val="0"/>
+              </a:spcAft>
+            </a:pPr>
+            <a:r>
+              <a:rPr sz="1150" b="0" i="0">
+                <a:solidFill>
+                  <a:srgbClr val="F28BA0"/>
+                </a:solidFill>
+                <a:latin typeface="Arial"/>
+              </a:rPr>
+              <a:t>Δp = 8 bar: r* = 0.025 µm</a:t>
+            </a:r>
+          </a:p>
+        </p:txBody>
+      </p:sp>
+      <p:sp>
+        <p:nvSpPr>
+          <p:cNvPr id="48" name="C2-E15 round_rect 46" descr="sci-ppt:o046"/>
+          <p:cNvSpPr/>
+          <p:nvPr/>
+        </p:nvSpPr>
+        <p:spPr>
+          <a:xfrm>
+            <a:off x="7315200" y="1371600"/>
+            <a:ext cx="4526280" cy="3657600"/>
+          </a:xfrm>
+          <a:prstGeom prst="roundRect">
             <a:avLst/>
           </a:prstGeom>
           <a:solidFill>
             <a:srgbClr val="213E4B"/>
           </a:solidFill>
-          <a:ln w="21590">
+          <a:ln w="20320">
             <a:solidFill>
-              <a:srgbClr val="B4C7D2"/>
+              <a:srgbClr val="8EDBD4"/>
             </a:solidFill>
           </a:ln>
           <a:effectLst/>
@@ -3170,46 +5201,14 @@
       </p:sp>
       <p:sp>
         <p:nvSpPr>
-          <p:cNvPr id="4" name="ellipse3" descr="sci-ppt:C2-E15-003"/>
-          <p:cNvSpPr/>
-          <p:nvPr/>
-        </p:nvSpPr>
-        <p:spPr>
-          <a:xfrm>
-            <a:off x="2389632" y="2328672"/>
-            <a:ext cx="707136" cy="707136"/>
-          </a:xfrm>
-          <a:prstGeom prst="ellipse">
-            <a:avLst/>
-          </a:prstGeom>
-          <a:solidFill>
-            <a:srgbClr val="F6BC77"/>
-          </a:solidFill>
-          <a:ln w="21590">
-            <a:solidFill>
-              <a:srgbClr val="B4C7D2"/>
-            </a:solidFill>
-          </a:ln>
-          <a:effectLst/>
-        </p:spPr>
-        <p:txBody>
-          <a:bodyPr rtlCol="0" anchor="ctr"/>
-          <a:lstStyle/>
-          <a:p>
-            <a:pPr algn="ctr"/>
-          </a:p>
-        </p:txBody>
-      </p:sp>
-      <p:sp>
-        <p:nvSpPr>
-          <p:cNvPr id="5" name="text4" descr="sci-ppt:C2-E15-004"/>
+          <p:cNvPr id="49" name="C2-E15 text 47" descr="sci-ppt:o047"/>
           <p:cNvSpPr txBox="1"/>
           <p:nvPr/>
         </p:nvSpPr>
         <p:spPr>
           <a:xfrm>
-            <a:off x="1706880" y="853440"/>
-            <a:ext cx="4876800" cy="359054"/>
+            <a:off x="7424927" y="1426464"/>
+            <a:ext cx="4306824" cy="254889"/>
           </a:xfrm>
           <a:prstGeom prst="rect">
             <a:avLst/>
@@ -3218,7 +5217,7 @@
           <a:effectLst/>
         </p:spPr>
         <p:txBody>
-          <a:bodyPr wrap="none" lIns="27432" rIns="27432" tIns="18288" bIns="18288" anchor="ctr">
+          <a:bodyPr wrap="none" lIns="18288" rIns="18288" tIns="18288" bIns="18288" anchor="t">
             <a:spAutoFit/>
           </a:bodyPr>
           <a:lstStyle/>
@@ -3229,27 +5228,67 @@
               </a:spcAft>
             </a:pPr>
             <a:r>
-              <a:rPr sz="1823" b="0" i="0">
+              <a:rPr sz="1350" b="1" i="0">
+                <a:solidFill>
+                  <a:srgbClr val="8EDBD4"/>
+                </a:solidFill>
+                <a:latin typeface="Arial"/>
+              </a:rPr>
+              <a:t>Setting dW/drₙ = 0</a:t>
+            </a:r>
+          </a:p>
+        </p:txBody>
+      </p:sp>
+      <p:sp>
+        <p:nvSpPr>
+          <p:cNvPr id="50" name="C2-E15 text 48" descr="sci-ppt:o048"/>
+          <p:cNvSpPr txBox="1"/>
+          <p:nvPr/>
+        </p:nvSpPr>
+        <p:spPr>
+          <a:xfrm>
+            <a:off x="7452360" y="1828800"/>
+            <a:ext cx="4297680" cy="247142"/>
+          </a:xfrm>
+          <a:prstGeom prst="rect">
+            <a:avLst/>
+          </a:prstGeom>
+          <a:noFill/>
+          <a:effectLst/>
+        </p:spPr>
+        <p:txBody>
+          <a:bodyPr wrap="none" lIns="18288" rIns="18288" tIns="18288" bIns="18288" anchor="t">
+            <a:spAutoFit/>
+          </a:bodyPr>
+          <a:lstStyle/>
+          <a:p>
+            <a:pPr algn="l">
+              <a:spcAft>
+                <a:spcPts val="0"/>
+              </a:spcAft>
+            </a:pPr>
+            <a:r>
+              <a:rPr sz="1300" b="1" i="0">
                 <a:solidFill>
                   <a:srgbClr val="E7F0F3"/>
                 </a:solidFill>
                 <a:latin typeface="Arial"/>
               </a:rPr>
-              <a:t>Finite PFC liquid: p_d</a:t>
-            </a:r>
-          </a:p>
-        </p:txBody>
-      </p:sp>
-      <p:sp>
-        <p:nvSpPr>
-          <p:cNvPr id="6" name="text5" descr="sci-ppt:C2-E15-005"/>
+              <a:t>dW/drₙ = 4π rₙ (2σᵥₚ − Δpₙ rₙ)</a:t>
+            </a:r>
+          </a:p>
+        </p:txBody>
+      </p:sp>
+      <p:sp>
+        <p:nvSpPr>
+          <p:cNvPr id="51" name="C2-E15 text 49" descr="sci-ppt:o049"/>
           <p:cNvSpPr txBox="1"/>
           <p:nvPr/>
         </p:nvSpPr>
         <p:spPr>
           <a:xfrm>
-            <a:off x="1341120" y="4267200"/>
-            <a:ext cx="5608320" cy="321259"/>
+            <a:off x="7452360" y="2331720"/>
+            <a:ext cx="4297680" cy="247142"/>
           </a:xfrm>
           <a:prstGeom prst="rect">
             <a:avLst/>
@@ -3258,7 +5297,7 @@
           <a:effectLst/>
         </p:spPr>
         <p:txBody>
-          <a:bodyPr wrap="none" lIns="27432" rIns="27432" tIns="18288" bIns="18288" anchor="ctr">
+          <a:bodyPr wrap="none" lIns="18288" rIns="18288" tIns="18288" bIns="18288" anchor="t">
             <a:spAutoFit/>
           </a:bodyPr>
           <a:lstStyle/>
@@ -3269,75 +5308,139 @@
               </a:spcAft>
             </a:pPr>
             <a:r>
-              <a:rPr sz="1632" b="0" i="0">
+              <a:rPr sz="1300" b="1" i="0">
+                <a:solidFill>
+                  <a:srgbClr val="F2B880"/>
+                </a:solidFill>
+                <a:latin typeface="Arial"/>
+              </a:rPr>
+              <a:t>r* = 2σᵥₚ / Δpₙ   (Δpₙ &gt; 0)</a:t>
+            </a:r>
+          </a:p>
+        </p:txBody>
+      </p:sp>
+      <p:sp>
+        <p:nvSpPr>
+          <p:cNvPr id="52" name="C2-E15 text 50" descr="sci-ppt:o050"/>
+          <p:cNvSpPr txBox="1"/>
+          <p:nvPr/>
+        </p:nvSpPr>
+        <p:spPr>
+          <a:xfrm>
+            <a:off x="7452360" y="2834640"/>
+            <a:ext cx="4297680" cy="247142"/>
+          </a:xfrm>
+          <a:prstGeom prst="rect">
+            <a:avLst/>
+          </a:prstGeom>
+          <a:noFill/>
+          <a:effectLst/>
+        </p:spPr>
+        <p:txBody>
+          <a:bodyPr wrap="none" lIns="18288" rIns="18288" tIns="18288" bIns="18288" anchor="t">
+            <a:spAutoFit/>
+          </a:bodyPr>
+          <a:lstStyle/>
+          <a:p>
+            <a:pPr algn="l">
+              <a:spcAft>
+                <a:spcPts val="0"/>
+              </a:spcAft>
+            </a:pPr>
+            <a:r>
+              <a:rPr sz="1300" b="1" i="0">
+                <a:solidFill>
+                  <a:srgbClr val="F28BA0"/>
+                </a:solidFill>
+                <a:latin typeface="Arial"/>
+              </a:rPr>
+              <a:t>d²W/drₙ² at r* = −8πσᵥₚ &lt; 0</a:t>
+            </a:r>
+          </a:p>
+        </p:txBody>
+      </p:sp>
+      <p:sp>
+        <p:nvSpPr>
+          <p:cNvPr id="53" name="C2-E15 text 51" descr="sci-ppt:o051"/>
+          <p:cNvSpPr txBox="1"/>
+          <p:nvPr/>
+        </p:nvSpPr>
+        <p:spPr>
+          <a:xfrm>
+            <a:off x="7452360" y="3429000"/>
+            <a:ext cx="4297680" cy="603504"/>
+          </a:xfrm>
+          <a:prstGeom prst="rect">
+            <a:avLst/>
+          </a:prstGeom>
+          <a:noFill/>
+          <a:effectLst/>
+        </p:spPr>
+        <p:txBody>
+          <a:bodyPr wrap="none" lIns="18288" rIns="18288" tIns="18288" bIns="18288" anchor="t">
+            <a:spAutoFit/>
+          </a:bodyPr>
+          <a:lstStyle/>
+          <a:p>
+            <a:pPr algn="l">
+              <a:spcAft>
+                <a:spcPts val="0"/>
+              </a:spcAft>
+            </a:pPr>
+            <a:r>
+              <a:rPr sz="1200" b="0" i="0">
                 <a:solidFill>
                   <a:srgbClr val="E7F0F3"/>
                 </a:solidFill>
                 <a:latin typeface="Arial"/>
               </a:rPr>
-              <a:t>Inner interface σ_vp; outer σ_pc</a:t>
-            </a:r>
-          </a:p>
-        </p:txBody>
-      </p:sp>
-      <p:cxnSp>
-        <p:nvCxnSpPr>
-          <p:cNvPr id="7" name="arrow6" descr="sci-ppt:C2-E15-006"/>
-          <p:cNvCxnSpPr/>
-          <p:nvPr/>
-        </p:nvCxnSpPr>
-        <p:spPr>
-          <a:xfrm>
-            <a:off x="6705600" y="3901440"/>
-            <a:ext cx="4267200" cy="0"/>
-          </a:xfrm>
-          <a:prstGeom prst="line">
-            <a:avLst/>
-          </a:prstGeom>
-          <a:ln w="25400">
-            <a:solidFill>
-              <a:srgbClr val="8EDBD4"/>
-            </a:solidFill>
-            <a:headEnd type="none" w="med" len="med"/>
-            <a:tailEnd type="triangle" w="med" len="med"/>
-          </a:ln>
-          <a:effectLst/>
-        </p:spPr>
-      </p:cxnSp>
-      <p:cxnSp>
-        <p:nvCxnSpPr>
-          <p:cNvPr id="8" name="arrow7" descr="sci-ppt:C2-E15-007"/>
-          <p:cNvCxnSpPr/>
-          <p:nvPr/>
-        </p:nvCxnSpPr>
-        <p:spPr>
-          <a:xfrm flipV="1">
-            <a:off x="6705600" y="1463040"/>
-            <a:ext cx="0" cy="2438400"/>
-          </a:xfrm>
-          <a:prstGeom prst="line">
-            <a:avLst/>
-          </a:prstGeom>
-          <a:ln w="25400">
-            <a:solidFill>
-              <a:srgbClr val="8EDBD4"/>
-            </a:solidFill>
-            <a:headEnd type="none" w="med" len="med"/>
-            <a:tailEnd type="triangle" w="med" len="med"/>
-          </a:ln>
-          <a:effectLst/>
-        </p:spPr>
-      </p:cxnSp>
-      <p:sp>
-        <p:nvSpPr>
-          <p:cNvPr id="9" name="text8" descr="sci-ppt:C2-E15-008"/>
+              <a:t>Negative curvature means a maximum, not a stable</a:t>
+            </a:r>
+          </a:p>
+          <a:p>
+            <a:pPr algn="l">
+              <a:spcAft>
+                <a:spcPts val="0"/>
+              </a:spcAft>
+            </a:pPr>
+            <a:r>
+              <a:rPr sz="1200" b="0" i="0">
+                <a:solidFill>
+                  <a:srgbClr val="E7F0F3"/>
+                </a:solidFill>
+                <a:latin typeface="Arial"/>
+              </a:rPr>
+              <a:t>nucleus: larger superheat only moves the peak to</a:t>
+            </a:r>
+          </a:p>
+          <a:p>
+            <a:pPr algn="l">
+              <a:spcAft>
+                <a:spcPts val="0"/>
+              </a:spcAft>
+            </a:pPr>
+            <a:r>
+              <a:rPr sz="1200" b="0" i="0">
+                <a:solidFill>
+                  <a:srgbClr val="E7F0F3"/>
+                </a:solidFill>
+                <a:latin typeface="Arial"/>
+              </a:rPr>
+              <a:t>smaller r.</a:t>
+            </a:r>
+          </a:p>
+        </p:txBody>
+      </p:sp>
+      <p:sp>
+        <p:nvSpPr>
+          <p:cNvPr id="54" name="C2-E15 text 52" descr="sci-ppt:o052"/>
           <p:cNvSpPr txBox="1"/>
           <p:nvPr/>
         </p:nvSpPr>
         <p:spPr>
           <a:xfrm>
-            <a:off x="9997440" y="4023360"/>
-            <a:ext cx="1828800" cy="321259"/>
+            <a:off x="914400" y="5733288"/>
+            <a:ext cx="10972800" cy="239395"/>
           </a:xfrm>
           <a:prstGeom prst="rect">
             <a:avLst/>
@@ -3346,7 +5449,7 @@
           <a:effectLst/>
         </p:spPr>
         <p:txBody>
-          <a:bodyPr wrap="none" lIns="27432" rIns="27432" tIns="18288" bIns="18288" anchor="ctr">
+          <a:bodyPr wrap="none" lIns="18288" rIns="18288" tIns="18288" bIns="18288" anchor="t">
             <a:spAutoFit/>
           </a:bodyPr>
           <a:lstStyle/>
@@ -3357,27 +5460,27 @@
               </a:spcAft>
             </a:pPr>
             <a:r>
-              <a:rPr sz="1632" b="0" i="0">
+              <a:rPr sz="1250" b="0" i="0">
                 <a:solidFill>
-                  <a:srgbClr val="E7F0F3"/>
+                  <a:srgbClr val="B4C7D2"/>
                 </a:solidFill>
                 <a:latin typeface="Arial"/>
               </a:rPr>
-              <a:t>r_n</a:t>
-            </a:r>
-          </a:p>
-        </p:txBody>
-      </p:sp>
-      <p:sp>
-        <p:nvSpPr>
-          <p:cNvPr id="10" name="text9" descr="sci-ppt:C2-E15-009"/>
+              <a:t>Illustrative σᵥₚ = 0.010 N/m (assumed). Doubling Δpₙ halves r* and cuts the barrier by four.</a:t>
+            </a:r>
+          </a:p>
+        </p:txBody>
+      </p:sp>
+      <p:sp>
+        <p:nvSpPr>
+          <p:cNvPr id="55" name="C2-E15 text 53" descr="sci-ppt:o053"/>
           <p:cNvSpPr txBox="1"/>
           <p:nvPr/>
         </p:nvSpPr>
         <p:spPr>
           <a:xfrm>
-            <a:off x="6583680" y="1097280"/>
-            <a:ext cx="3657600" cy="321259"/>
+            <a:off x="320040" y="6510528"/>
+            <a:ext cx="11521440" cy="200660"/>
           </a:xfrm>
           <a:prstGeom prst="rect">
             <a:avLst/>
@@ -3386,7 +5489,7 @@
           <a:effectLst/>
         </p:spPr>
         <p:txBody>
-          <a:bodyPr wrap="none" lIns="27432" rIns="27432" tIns="18288" bIns="18288" anchor="ctr">
+          <a:bodyPr wrap="none" lIns="18288" rIns="18288" tIns="18288" bIns="18288" anchor="t">
             <a:spAutoFit/>
           </a:bodyPr>
           <a:lstStyle/>
@@ -3397,1293 +5500,13 @@
               </a:spcAft>
             </a:pPr>
             <a:r>
-              <a:rPr sz="1632" b="0" i="0">
-                <a:solidFill>
-                  <a:srgbClr val="E7F0F3"/>
-                </a:solidFill>
-                <a:latin typeface="Arial"/>
-              </a:rPr>
-              <a:t>W</a:t>
-            </a:r>
-          </a:p>
-        </p:txBody>
-      </p:sp>
-      <p:cxnSp>
-        <p:nvCxnSpPr>
-          <p:cNvPr id="11" name="line10" descr="sci-ppt:C2-E15-010"/>
-          <p:cNvCxnSpPr/>
-          <p:nvPr/>
-        </p:nvCxnSpPr>
-        <p:spPr>
-          <a:xfrm flipV="1">
-            <a:off x="6766560" y="3896425"/>
-            <a:ext cx="100584" cy="5015"/>
-          </a:xfrm>
-          <a:prstGeom prst="line">
-            <a:avLst/>
-          </a:prstGeom>
-          <a:ln w="25400">
-            <a:solidFill>
-              <a:srgbClr val="8EDBD4"/>
-            </a:solidFill>
-          </a:ln>
-          <a:effectLst/>
-        </p:spPr>
-      </p:cxnSp>
-      <p:cxnSp>
-        <p:nvCxnSpPr>
-          <p:cNvPr id="12" name="line11" descr="sci-ppt:C2-E15-011"/>
-          <p:cNvCxnSpPr/>
-          <p:nvPr/>
-        </p:nvCxnSpPr>
-        <p:spPr>
-          <a:xfrm flipV="1">
-            <a:off x="6867144" y="3881894"/>
-            <a:ext cx="100584" cy="14531"/>
-          </a:xfrm>
-          <a:prstGeom prst="line">
-            <a:avLst/>
-          </a:prstGeom>
-          <a:ln w="25400">
-            <a:solidFill>
-              <a:srgbClr val="8EDBD4"/>
-            </a:solidFill>
-          </a:ln>
-          <a:effectLst/>
-        </p:spPr>
-      </p:cxnSp>
-      <p:cxnSp>
-        <p:nvCxnSpPr>
-          <p:cNvPr id="13" name="line12" descr="sci-ppt:C2-E15-012"/>
-          <p:cNvCxnSpPr/>
-          <p:nvPr/>
-        </p:nvCxnSpPr>
-        <p:spPr>
-          <a:xfrm flipV="1">
-            <a:off x="6967728" y="3858620"/>
-            <a:ext cx="100584" cy="23274"/>
-          </a:xfrm>
-          <a:prstGeom prst="line">
-            <a:avLst/>
-          </a:prstGeom>
-          <a:ln w="25400">
-            <a:solidFill>
-              <a:srgbClr val="8EDBD4"/>
-            </a:solidFill>
-          </a:ln>
-          <a:effectLst/>
-        </p:spPr>
-      </p:cxnSp>
-      <p:cxnSp>
-        <p:nvCxnSpPr>
-          <p:cNvPr id="14" name="line13" descr="sci-ppt:C2-E15-013"/>
-          <p:cNvCxnSpPr/>
-          <p:nvPr/>
-        </p:nvCxnSpPr>
-        <p:spPr>
-          <a:xfrm flipV="1">
-            <a:off x="7068312" y="3827373"/>
-            <a:ext cx="100584" cy="31247"/>
-          </a:xfrm>
-          <a:prstGeom prst="line">
-            <a:avLst/>
-          </a:prstGeom>
-          <a:ln w="25400">
-            <a:solidFill>
-              <a:srgbClr val="8EDBD4"/>
-            </a:solidFill>
-          </a:ln>
-          <a:effectLst/>
-        </p:spPr>
-      </p:cxnSp>
-      <p:cxnSp>
-        <p:nvCxnSpPr>
-          <p:cNvPr id="15" name="line14" descr="sci-ppt:C2-E15-014"/>
-          <p:cNvCxnSpPr/>
-          <p:nvPr/>
-        </p:nvCxnSpPr>
-        <p:spPr>
-          <a:xfrm flipV="1">
-            <a:off x="7168896" y="3788925"/>
-            <a:ext cx="100584" cy="38448"/>
-          </a:xfrm>
-          <a:prstGeom prst="line">
-            <a:avLst/>
-          </a:prstGeom>
-          <a:ln w="25400">
-            <a:solidFill>
-              <a:srgbClr val="8EDBD4"/>
-            </a:solidFill>
-          </a:ln>
-          <a:effectLst/>
-        </p:spPr>
-      </p:cxnSp>
-      <p:cxnSp>
-        <p:nvCxnSpPr>
-          <p:cNvPr id="16" name="line15" descr="sci-ppt:C2-E15-015"/>
-          <p:cNvCxnSpPr/>
-          <p:nvPr/>
-        </p:nvCxnSpPr>
-        <p:spPr>
-          <a:xfrm flipV="1">
-            <a:off x="7269480" y="3744048"/>
-            <a:ext cx="100584" cy="44877"/>
-          </a:xfrm>
-          <a:prstGeom prst="line">
-            <a:avLst/>
-          </a:prstGeom>
-          <a:ln w="25400">
-            <a:solidFill>
-              <a:srgbClr val="8EDBD4"/>
-            </a:solidFill>
-          </a:ln>
-          <a:effectLst/>
-        </p:spPr>
-      </p:cxnSp>
-      <p:cxnSp>
-        <p:nvCxnSpPr>
-          <p:cNvPr id="17" name="line16" descr="sci-ppt:C2-E15-016"/>
-          <p:cNvCxnSpPr/>
-          <p:nvPr/>
-        </p:nvCxnSpPr>
-        <p:spPr>
-          <a:xfrm flipV="1">
-            <a:off x="7370064" y="3693514"/>
-            <a:ext cx="100584" cy="50534"/>
-          </a:xfrm>
-          <a:prstGeom prst="line">
-            <a:avLst/>
-          </a:prstGeom>
-          <a:ln w="25400">
-            <a:solidFill>
-              <a:srgbClr val="8EDBD4"/>
-            </a:solidFill>
-          </a:ln>
-          <a:effectLst/>
-        </p:spPr>
-      </p:cxnSp>
-      <p:cxnSp>
-        <p:nvCxnSpPr>
-          <p:cNvPr id="18" name="line17" descr="sci-ppt:C2-E15-017"/>
-          <p:cNvCxnSpPr/>
-          <p:nvPr/>
-        </p:nvCxnSpPr>
-        <p:spPr>
-          <a:xfrm flipV="1">
-            <a:off x="7470648" y="3638092"/>
-            <a:ext cx="100583" cy="55422"/>
-          </a:xfrm>
-          <a:prstGeom prst="line">
-            <a:avLst/>
-          </a:prstGeom>
-          <a:ln w="25400">
-            <a:solidFill>
-              <a:srgbClr val="8EDBD4"/>
-            </a:solidFill>
-          </a:ln>
-          <a:effectLst/>
-        </p:spPr>
-      </p:cxnSp>
-      <p:cxnSp>
-        <p:nvCxnSpPr>
-          <p:cNvPr id="19" name="line18" descr="sci-ppt:C2-E15-018"/>
-          <p:cNvCxnSpPr/>
-          <p:nvPr/>
-        </p:nvCxnSpPr>
-        <p:spPr>
-          <a:xfrm flipV="1">
-            <a:off x="7571231" y="3578556"/>
-            <a:ext cx="100585" cy="59536"/>
-          </a:xfrm>
-          <a:prstGeom prst="line">
-            <a:avLst/>
-          </a:prstGeom>
-          <a:ln w="25400">
-            <a:solidFill>
-              <a:srgbClr val="8EDBD4"/>
-            </a:solidFill>
-          </a:ln>
-          <a:effectLst/>
-        </p:spPr>
-      </p:cxnSp>
-      <p:cxnSp>
-        <p:nvCxnSpPr>
-          <p:cNvPr id="20" name="line19" descr="sci-ppt:C2-E15-019"/>
-          <p:cNvCxnSpPr/>
-          <p:nvPr/>
-        </p:nvCxnSpPr>
-        <p:spPr>
-          <a:xfrm flipV="1">
-            <a:off x="7671816" y="3515677"/>
-            <a:ext cx="100584" cy="62879"/>
-          </a:xfrm>
-          <a:prstGeom prst="line">
-            <a:avLst/>
-          </a:prstGeom>
-          <a:ln w="25400">
-            <a:solidFill>
-              <a:srgbClr val="8EDBD4"/>
-            </a:solidFill>
-          </a:ln>
-          <a:effectLst/>
-        </p:spPr>
-      </p:cxnSp>
-      <p:cxnSp>
-        <p:nvCxnSpPr>
-          <p:cNvPr id="21" name="line20" descr="sci-ppt:C2-E15-020"/>
-          <p:cNvCxnSpPr/>
-          <p:nvPr/>
-        </p:nvCxnSpPr>
-        <p:spPr>
-          <a:xfrm flipV="1">
-            <a:off x="7772400" y="3450226"/>
-            <a:ext cx="100583" cy="65451"/>
-          </a:xfrm>
-          <a:prstGeom prst="line">
-            <a:avLst/>
-          </a:prstGeom>
-          <a:ln w="25400">
-            <a:solidFill>
-              <a:srgbClr val="8EDBD4"/>
-            </a:solidFill>
-          </a:ln>
-          <a:effectLst/>
-        </p:spPr>
-      </p:cxnSp>
-      <p:cxnSp>
-        <p:nvCxnSpPr>
-          <p:cNvPr id="22" name="line21" descr="sci-ppt:C2-E15-021"/>
-          <p:cNvCxnSpPr/>
-          <p:nvPr/>
-        </p:nvCxnSpPr>
-        <p:spPr>
-          <a:xfrm flipV="1">
-            <a:off x="7872983" y="3382975"/>
-            <a:ext cx="100585" cy="67251"/>
-          </a:xfrm>
-          <a:prstGeom prst="line">
-            <a:avLst/>
-          </a:prstGeom>
-          <a:ln w="25400">
-            <a:solidFill>
-              <a:srgbClr val="8EDBD4"/>
-            </a:solidFill>
-          </a:ln>
-          <a:effectLst/>
-        </p:spPr>
-      </p:cxnSp>
-      <p:cxnSp>
-        <p:nvCxnSpPr>
-          <p:cNvPr id="23" name="line22" descr="sci-ppt:C2-E15-022"/>
-          <p:cNvCxnSpPr/>
-          <p:nvPr/>
-        </p:nvCxnSpPr>
-        <p:spPr>
-          <a:xfrm flipV="1">
-            <a:off x="7973568" y="3314695"/>
-            <a:ext cx="100584" cy="68280"/>
-          </a:xfrm>
-          <a:prstGeom prst="line">
-            <a:avLst/>
-          </a:prstGeom>
-          <a:ln w="25400">
-            <a:solidFill>
-              <a:srgbClr val="8EDBD4"/>
-            </a:solidFill>
-          </a:ln>
-          <a:effectLst/>
-        </p:spPr>
-      </p:cxnSp>
-      <p:cxnSp>
-        <p:nvCxnSpPr>
-          <p:cNvPr id="24" name="line23" descr="sci-ppt:C2-E15-023"/>
-          <p:cNvCxnSpPr/>
-          <p:nvPr/>
-        </p:nvCxnSpPr>
-        <p:spPr>
-          <a:xfrm flipV="1">
-            <a:off x="8074152" y="3246158"/>
-            <a:ext cx="100584" cy="68537"/>
-          </a:xfrm>
-          <a:prstGeom prst="line">
-            <a:avLst/>
-          </a:prstGeom>
-          <a:ln w="25400">
-            <a:solidFill>
-              <a:srgbClr val="8EDBD4"/>
-            </a:solidFill>
-          </a:ln>
-          <a:effectLst/>
-        </p:spPr>
-      </p:cxnSp>
-      <p:cxnSp>
-        <p:nvCxnSpPr>
-          <p:cNvPr id="25" name="line24" descr="sci-ppt:C2-E15-024"/>
-          <p:cNvCxnSpPr/>
-          <p:nvPr/>
-        </p:nvCxnSpPr>
-        <p:spPr>
-          <a:xfrm flipV="1">
-            <a:off x="8174736" y="3178135"/>
-            <a:ext cx="100584" cy="68023"/>
-          </a:xfrm>
-          <a:prstGeom prst="line">
-            <a:avLst/>
-          </a:prstGeom>
-          <a:ln w="25400">
-            <a:solidFill>
-              <a:srgbClr val="8EDBD4"/>
-            </a:solidFill>
-          </a:ln>
-          <a:effectLst/>
-        </p:spPr>
-      </p:cxnSp>
-      <p:cxnSp>
-        <p:nvCxnSpPr>
-          <p:cNvPr id="26" name="line25" descr="sci-ppt:C2-E15-025"/>
-          <p:cNvCxnSpPr/>
-          <p:nvPr/>
-        </p:nvCxnSpPr>
-        <p:spPr>
-          <a:xfrm flipV="1">
-            <a:off x="8275320" y="3111398"/>
-            <a:ext cx="100584" cy="66737"/>
-          </a:xfrm>
-          <a:prstGeom prst="line">
-            <a:avLst/>
-          </a:prstGeom>
-          <a:ln w="25400">
-            <a:solidFill>
-              <a:srgbClr val="8EDBD4"/>
-            </a:solidFill>
-          </a:ln>
-          <a:effectLst/>
-        </p:spPr>
-      </p:cxnSp>
-      <p:cxnSp>
-        <p:nvCxnSpPr>
-          <p:cNvPr id="27" name="line26" descr="sci-ppt:C2-E15-026"/>
-          <p:cNvCxnSpPr/>
-          <p:nvPr/>
-        </p:nvCxnSpPr>
-        <p:spPr>
-          <a:xfrm flipV="1">
-            <a:off x="8375904" y="3046718"/>
-            <a:ext cx="100584" cy="64680"/>
-          </a:xfrm>
-          <a:prstGeom prst="line">
-            <a:avLst/>
-          </a:prstGeom>
-          <a:ln w="25400">
-            <a:solidFill>
-              <a:srgbClr val="8EDBD4"/>
-            </a:solidFill>
-          </a:ln>
-          <a:effectLst/>
-        </p:spPr>
-      </p:cxnSp>
-      <p:cxnSp>
-        <p:nvCxnSpPr>
-          <p:cNvPr id="28" name="line27" descr="sci-ppt:C2-E15-027"/>
-          <p:cNvCxnSpPr/>
-          <p:nvPr/>
-        </p:nvCxnSpPr>
-        <p:spPr>
-          <a:xfrm flipV="1">
-            <a:off x="8476488" y="2984868"/>
-            <a:ext cx="100584" cy="61850"/>
-          </a:xfrm>
-          <a:prstGeom prst="line">
-            <a:avLst/>
-          </a:prstGeom>
-          <a:ln w="25400">
-            <a:solidFill>
-              <a:srgbClr val="8EDBD4"/>
-            </a:solidFill>
-          </a:ln>
-          <a:effectLst/>
-        </p:spPr>
-      </p:cxnSp>
-      <p:cxnSp>
-        <p:nvCxnSpPr>
-          <p:cNvPr id="29" name="line28" descr="sci-ppt:C2-E15-028"/>
-          <p:cNvCxnSpPr/>
-          <p:nvPr/>
-        </p:nvCxnSpPr>
-        <p:spPr>
-          <a:xfrm flipV="1">
-            <a:off x="8577072" y="2926618"/>
-            <a:ext cx="100584" cy="58250"/>
-          </a:xfrm>
-          <a:prstGeom prst="line">
-            <a:avLst/>
-          </a:prstGeom>
-          <a:ln w="25400">
-            <a:solidFill>
-              <a:srgbClr val="8EDBD4"/>
-            </a:solidFill>
-          </a:ln>
-          <a:effectLst/>
-        </p:spPr>
-      </p:cxnSp>
-      <p:cxnSp>
-        <p:nvCxnSpPr>
-          <p:cNvPr id="30" name="line29" descr="sci-ppt:C2-E15-029"/>
-          <p:cNvCxnSpPr/>
-          <p:nvPr/>
-        </p:nvCxnSpPr>
-        <p:spPr>
-          <a:xfrm flipV="1">
-            <a:off x="8677656" y="2872740"/>
-            <a:ext cx="100584" cy="53878"/>
-          </a:xfrm>
-          <a:prstGeom prst="line">
-            <a:avLst/>
-          </a:prstGeom>
-          <a:ln w="25400">
-            <a:solidFill>
-              <a:srgbClr val="8EDBD4"/>
-            </a:solidFill>
-          </a:ln>
-          <a:effectLst/>
-        </p:spPr>
-      </p:cxnSp>
-      <p:cxnSp>
-        <p:nvCxnSpPr>
-          <p:cNvPr id="31" name="line30" descr="sci-ppt:C2-E15-030"/>
-          <p:cNvCxnSpPr/>
-          <p:nvPr/>
-        </p:nvCxnSpPr>
-        <p:spPr>
-          <a:xfrm flipV="1">
-            <a:off x="8778240" y="2824005"/>
-            <a:ext cx="100584" cy="48735"/>
-          </a:xfrm>
-          <a:prstGeom prst="line">
-            <a:avLst/>
-          </a:prstGeom>
-          <a:ln w="25400">
-            <a:solidFill>
-              <a:srgbClr val="8EDBD4"/>
-            </a:solidFill>
-          </a:ln>
-          <a:effectLst/>
-        </p:spPr>
-      </p:cxnSp>
-      <p:cxnSp>
-        <p:nvCxnSpPr>
-          <p:cNvPr id="32" name="line31" descr="sci-ppt:C2-E15-031"/>
-          <p:cNvCxnSpPr/>
-          <p:nvPr/>
-        </p:nvCxnSpPr>
-        <p:spPr>
-          <a:xfrm flipV="1">
-            <a:off x="8878824" y="2781185"/>
-            <a:ext cx="100584" cy="42820"/>
-          </a:xfrm>
-          <a:prstGeom prst="line">
-            <a:avLst/>
-          </a:prstGeom>
-          <a:ln w="25400">
-            <a:solidFill>
-              <a:srgbClr val="8EDBD4"/>
-            </a:solidFill>
-          </a:ln>
-          <a:effectLst/>
-        </p:spPr>
-      </p:cxnSp>
-      <p:cxnSp>
-        <p:nvCxnSpPr>
-          <p:cNvPr id="33" name="line32" descr="sci-ppt:C2-E15-032"/>
-          <p:cNvCxnSpPr/>
-          <p:nvPr/>
-        </p:nvCxnSpPr>
-        <p:spPr>
-          <a:xfrm flipV="1">
-            <a:off x="8979408" y="2745052"/>
-            <a:ext cx="100584" cy="36133"/>
-          </a:xfrm>
-          <a:prstGeom prst="line">
-            <a:avLst/>
-          </a:prstGeom>
-          <a:ln w="25400">
-            <a:solidFill>
-              <a:srgbClr val="8EDBD4"/>
-            </a:solidFill>
-          </a:ln>
-          <a:effectLst/>
-        </p:spPr>
-      </p:cxnSp>
-      <p:cxnSp>
-        <p:nvCxnSpPr>
-          <p:cNvPr id="34" name="line33" descr="sci-ppt:C2-E15-033"/>
-          <p:cNvCxnSpPr/>
-          <p:nvPr/>
-        </p:nvCxnSpPr>
-        <p:spPr>
-          <a:xfrm flipV="1">
-            <a:off x="9079992" y="2716377"/>
-            <a:ext cx="100584" cy="28675"/>
-          </a:xfrm>
-          <a:prstGeom prst="line">
-            <a:avLst/>
-          </a:prstGeom>
-          <a:ln w="25400">
-            <a:solidFill>
-              <a:srgbClr val="8EDBD4"/>
-            </a:solidFill>
-          </a:ln>
-          <a:effectLst/>
-        </p:spPr>
-      </p:cxnSp>
-      <p:cxnSp>
-        <p:nvCxnSpPr>
-          <p:cNvPr id="35" name="line34" descr="sci-ppt:C2-E15-034"/>
-          <p:cNvCxnSpPr/>
-          <p:nvPr/>
-        </p:nvCxnSpPr>
-        <p:spPr>
-          <a:xfrm flipV="1">
-            <a:off x="9180576" y="2695932"/>
-            <a:ext cx="100584" cy="20445"/>
-          </a:xfrm>
-          <a:prstGeom prst="line">
-            <a:avLst/>
-          </a:prstGeom>
-          <a:ln w="25400">
-            <a:solidFill>
-              <a:srgbClr val="8EDBD4"/>
-            </a:solidFill>
-          </a:ln>
-          <a:effectLst/>
-        </p:spPr>
-      </p:cxnSp>
-      <p:cxnSp>
-        <p:nvCxnSpPr>
-          <p:cNvPr id="36" name="line35" descr="sci-ppt:C2-E15-035"/>
-          <p:cNvCxnSpPr/>
-          <p:nvPr/>
-        </p:nvCxnSpPr>
-        <p:spPr>
-          <a:xfrm flipV="1">
-            <a:off x="9281160" y="2684487"/>
-            <a:ext cx="100584" cy="11445"/>
-          </a:xfrm>
-          <a:prstGeom prst="line">
-            <a:avLst/>
-          </a:prstGeom>
-          <a:ln w="25400">
-            <a:solidFill>
-              <a:srgbClr val="8EDBD4"/>
-            </a:solidFill>
-          </a:ln>
-          <a:effectLst/>
-        </p:spPr>
-      </p:cxnSp>
-      <p:cxnSp>
-        <p:nvCxnSpPr>
-          <p:cNvPr id="37" name="line36" descr="sci-ppt:C2-E15-036"/>
-          <p:cNvCxnSpPr/>
-          <p:nvPr/>
-        </p:nvCxnSpPr>
-        <p:spPr>
-          <a:xfrm flipV="1">
-            <a:off x="9381744" y="2682816"/>
-            <a:ext cx="100584" cy="1671"/>
-          </a:xfrm>
-          <a:prstGeom prst="line">
-            <a:avLst/>
-          </a:prstGeom>
-          <a:ln w="25400">
-            <a:solidFill>
-              <a:srgbClr val="8EDBD4"/>
-            </a:solidFill>
-          </a:ln>
-          <a:effectLst/>
-        </p:spPr>
-      </p:cxnSp>
-      <p:cxnSp>
-        <p:nvCxnSpPr>
-          <p:cNvPr id="38" name="line37" descr="sci-ppt:C2-E15-037"/>
-          <p:cNvCxnSpPr/>
-          <p:nvPr/>
-        </p:nvCxnSpPr>
-        <p:spPr>
-          <a:xfrm>
-            <a:off x="9482328" y="2682816"/>
-            <a:ext cx="100584" cy="8872"/>
-          </a:xfrm>
-          <a:prstGeom prst="line">
-            <a:avLst/>
-          </a:prstGeom>
-          <a:ln w="25400">
-            <a:solidFill>
-              <a:srgbClr val="8EDBD4"/>
-            </a:solidFill>
-          </a:ln>
-          <a:effectLst/>
-        </p:spPr>
-      </p:cxnSp>
-      <p:cxnSp>
-        <p:nvCxnSpPr>
-          <p:cNvPr id="39" name="line38" descr="sci-ppt:C2-E15-038"/>
-          <p:cNvCxnSpPr/>
-          <p:nvPr/>
-        </p:nvCxnSpPr>
-        <p:spPr>
-          <a:xfrm>
-            <a:off x="9582912" y="2691688"/>
-            <a:ext cx="100584" cy="20189"/>
-          </a:xfrm>
-          <a:prstGeom prst="line">
-            <a:avLst/>
-          </a:prstGeom>
-          <a:ln w="25400">
-            <a:solidFill>
-              <a:srgbClr val="8EDBD4"/>
-            </a:solidFill>
-          </a:ln>
-          <a:effectLst/>
-        </p:spPr>
-      </p:cxnSp>
-      <p:cxnSp>
-        <p:nvCxnSpPr>
-          <p:cNvPr id="40" name="line39" descr="sci-ppt:C2-E15-039"/>
-          <p:cNvCxnSpPr/>
-          <p:nvPr/>
-        </p:nvCxnSpPr>
-        <p:spPr>
-          <a:xfrm>
-            <a:off x="9683496" y="2711877"/>
-            <a:ext cx="100584" cy="32275"/>
-          </a:xfrm>
-          <a:prstGeom prst="line">
-            <a:avLst/>
-          </a:prstGeom>
-          <a:ln w="25400">
-            <a:solidFill>
-              <a:srgbClr val="8EDBD4"/>
-            </a:solidFill>
-          </a:ln>
-          <a:effectLst/>
-        </p:spPr>
-      </p:cxnSp>
-      <p:cxnSp>
-        <p:nvCxnSpPr>
-          <p:cNvPr id="41" name="line40" descr="sci-ppt:C2-E15-040"/>
-          <p:cNvCxnSpPr/>
-          <p:nvPr/>
-        </p:nvCxnSpPr>
-        <p:spPr>
-          <a:xfrm>
-            <a:off x="9784080" y="2744152"/>
-            <a:ext cx="100584" cy="45134"/>
-          </a:xfrm>
-          <a:prstGeom prst="line">
-            <a:avLst/>
-          </a:prstGeom>
-          <a:ln w="25400">
-            <a:solidFill>
-              <a:srgbClr val="8EDBD4"/>
-            </a:solidFill>
-          </a:ln>
-          <a:effectLst/>
-        </p:spPr>
-      </p:cxnSp>
-      <p:cxnSp>
-        <p:nvCxnSpPr>
-          <p:cNvPr id="42" name="line41" descr="sci-ppt:C2-E15-041"/>
-          <p:cNvCxnSpPr/>
-          <p:nvPr/>
-        </p:nvCxnSpPr>
-        <p:spPr>
-          <a:xfrm>
-            <a:off x="9884664" y="2789286"/>
-            <a:ext cx="100584" cy="58765"/>
-          </a:xfrm>
-          <a:prstGeom prst="line">
-            <a:avLst/>
-          </a:prstGeom>
-          <a:ln w="25400">
-            <a:solidFill>
-              <a:srgbClr val="8EDBD4"/>
-            </a:solidFill>
-          </a:ln>
-          <a:effectLst/>
-        </p:spPr>
-      </p:cxnSp>
-      <p:cxnSp>
-        <p:nvCxnSpPr>
-          <p:cNvPr id="43" name="line42" descr="sci-ppt:C2-E15-042"/>
-          <p:cNvCxnSpPr/>
-          <p:nvPr/>
-        </p:nvCxnSpPr>
-        <p:spPr>
-          <a:xfrm>
-            <a:off x="9985248" y="2848051"/>
-            <a:ext cx="100584" cy="73166"/>
-          </a:xfrm>
-          <a:prstGeom prst="line">
-            <a:avLst/>
-          </a:prstGeom>
-          <a:ln w="25400">
-            <a:solidFill>
-              <a:srgbClr val="8EDBD4"/>
-            </a:solidFill>
-          </a:ln>
-          <a:effectLst/>
-        </p:spPr>
-      </p:cxnSp>
-      <p:cxnSp>
-        <p:nvCxnSpPr>
-          <p:cNvPr id="44" name="line43" descr="sci-ppt:C2-E15-043"/>
-          <p:cNvCxnSpPr/>
-          <p:nvPr/>
-        </p:nvCxnSpPr>
-        <p:spPr>
-          <a:xfrm>
-            <a:off x="10085832" y="2921217"/>
-            <a:ext cx="100584" cy="88340"/>
-          </a:xfrm>
-          <a:prstGeom prst="line">
-            <a:avLst/>
-          </a:prstGeom>
-          <a:ln w="25400">
-            <a:solidFill>
-              <a:srgbClr val="8EDBD4"/>
-            </a:solidFill>
-          </a:ln>
-          <a:effectLst/>
-        </p:spPr>
-      </p:cxnSp>
-      <p:cxnSp>
-        <p:nvCxnSpPr>
-          <p:cNvPr id="45" name="line44" descr="sci-ppt:C2-E15-044"/>
-          <p:cNvCxnSpPr/>
-          <p:nvPr/>
-        </p:nvCxnSpPr>
-        <p:spPr>
-          <a:xfrm>
-            <a:off x="10186416" y="3009557"/>
-            <a:ext cx="100584" cy="104284"/>
-          </a:xfrm>
-          <a:prstGeom prst="line">
-            <a:avLst/>
-          </a:prstGeom>
-          <a:ln w="25400">
-            <a:solidFill>
-              <a:srgbClr val="8EDBD4"/>
-            </a:solidFill>
-          </a:ln>
-          <a:effectLst/>
-        </p:spPr>
-      </p:cxnSp>
-      <p:cxnSp>
-        <p:nvCxnSpPr>
-          <p:cNvPr id="46" name="line45" descr="sci-ppt:C2-E15-045"/>
-          <p:cNvCxnSpPr/>
-          <p:nvPr/>
-        </p:nvCxnSpPr>
-        <p:spPr>
-          <a:xfrm>
-            <a:off x="10287000" y="3113841"/>
-            <a:ext cx="100584" cy="121001"/>
-          </a:xfrm>
-          <a:prstGeom prst="line">
-            <a:avLst/>
-          </a:prstGeom>
-          <a:ln w="25400">
-            <a:solidFill>
-              <a:srgbClr val="8EDBD4"/>
-            </a:solidFill>
-          </a:ln>
-          <a:effectLst/>
-        </p:spPr>
-      </p:cxnSp>
-      <p:cxnSp>
-        <p:nvCxnSpPr>
-          <p:cNvPr id="47" name="line46" descr="sci-ppt:C2-E15-046"/>
-          <p:cNvCxnSpPr/>
-          <p:nvPr/>
-        </p:nvCxnSpPr>
-        <p:spPr>
-          <a:xfrm>
-            <a:off x="10387584" y="3234842"/>
-            <a:ext cx="100584" cy="138489"/>
-          </a:xfrm>
-          <a:prstGeom prst="line">
-            <a:avLst/>
-          </a:prstGeom>
-          <a:ln w="25400">
-            <a:solidFill>
-              <a:srgbClr val="8EDBD4"/>
-            </a:solidFill>
-          </a:ln>
-          <a:effectLst/>
-        </p:spPr>
-      </p:cxnSp>
-      <p:cxnSp>
-        <p:nvCxnSpPr>
-          <p:cNvPr id="48" name="line47" descr="sci-ppt:C2-E15-047"/>
-          <p:cNvCxnSpPr/>
-          <p:nvPr/>
-        </p:nvCxnSpPr>
-        <p:spPr>
-          <a:xfrm>
-            <a:off x="10488168" y="3373331"/>
-            <a:ext cx="100584" cy="156748"/>
-          </a:xfrm>
-          <a:prstGeom prst="line">
-            <a:avLst/>
-          </a:prstGeom>
-          <a:ln w="25400">
-            <a:solidFill>
-              <a:srgbClr val="8EDBD4"/>
-            </a:solidFill>
-          </a:ln>
-          <a:effectLst/>
-        </p:spPr>
-      </p:cxnSp>
-      <p:cxnSp>
-        <p:nvCxnSpPr>
-          <p:cNvPr id="49" name="line48" descr="sci-ppt:C2-E15-048"/>
-          <p:cNvCxnSpPr/>
-          <p:nvPr/>
-        </p:nvCxnSpPr>
-        <p:spPr>
-          <a:xfrm>
-            <a:off x="10588752" y="3530079"/>
-            <a:ext cx="100584" cy="175779"/>
-          </a:xfrm>
-          <a:prstGeom prst="line">
-            <a:avLst/>
-          </a:prstGeom>
-          <a:ln w="25400">
-            <a:solidFill>
-              <a:srgbClr val="8EDBD4"/>
-            </a:solidFill>
-          </a:ln>
-          <a:effectLst/>
-        </p:spPr>
-      </p:cxnSp>
-      <p:cxnSp>
-        <p:nvCxnSpPr>
-          <p:cNvPr id="50" name="line49" descr="sci-ppt:C2-E15-049"/>
-          <p:cNvCxnSpPr/>
-          <p:nvPr/>
-        </p:nvCxnSpPr>
-        <p:spPr>
-          <a:xfrm>
-            <a:off x="10689336" y="3705858"/>
-            <a:ext cx="100584" cy="195582"/>
-          </a:xfrm>
-          <a:prstGeom prst="line">
-            <a:avLst/>
-          </a:prstGeom>
-          <a:ln w="25400">
-            <a:solidFill>
-              <a:srgbClr val="8EDBD4"/>
-            </a:solidFill>
-          </a:ln>
-          <a:effectLst/>
-        </p:spPr>
-      </p:cxnSp>
-      <p:sp>
-        <p:nvSpPr>
-          <p:cNvPr id="51" name="text50" descr="sci-ppt:C2-E15-050"/>
-          <p:cNvSpPr txBox="1"/>
-          <p:nvPr/>
-        </p:nvSpPr>
-        <p:spPr>
-          <a:xfrm>
-            <a:off x="8595360" y="2194560"/>
-            <a:ext cx="2194560" cy="377952"/>
-          </a:xfrm>
-          <a:prstGeom prst="rect">
-            <a:avLst/>
-          </a:prstGeom>
-          <a:noFill/>
-          <a:effectLst/>
-        </p:spPr>
-        <p:txBody>
-          <a:bodyPr wrap="none" lIns="27432" rIns="27432" tIns="18288" bIns="18288" anchor="ctr">
-            <a:spAutoFit/>
-          </a:bodyPr>
-          <a:lstStyle/>
-          <a:p>
-            <a:pPr algn="l">
-              <a:spcAft>
-                <a:spcPts val="0"/>
-              </a:spcAft>
-            </a:pPr>
-            <a:r>
-              <a:rPr sz="1920" b="0" i="0">
-                <a:solidFill>
-                  <a:srgbClr val="E7F0F3"/>
-                </a:solidFill>
-                <a:latin typeface="Arial"/>
-              </a:rPr>
-              <a:t>r*, W*</a:t>
-            </a:r>
-          </a:p>
-        </p:txBody>
-      </p:sp>
-      <p:sp>
-        <p:nvSpPr>
-          <p:cNvPr id="52" name="text51" descr="sci-ppt:C2-E15-051"/>
-          <p:cNvSpPr txBox="1"/>
-          <p:nvPr/>
-        </p:nvSpPr>
-        <p:spPr>
-          <a:xfrm>
-            <a:off x="365760" y="4974336"/>
-            <a:ext cx="5547360" cy="321259"/>
-          </a:xfrm>
-          <a:prstGeom prst="rect">
-            <a:avLst/>
-          </a:prstGeom>
-          <a:noFill/>
-          <a:effectLst/>
-        </p:spPr>
-        <p:txBody>
-          <a:bodyPr wrap="none" lIns="27432" rIns="27432" tIns="18288" bIns="18288" anchor="ctr">
-            <a:spAutoFit/>
-          </a:bodyPr>
-          <a:lstStyle/>
-          <a:p>
-            <a:pPr algn="l">
-              <a:spcAft>
-                <a:spcPts val="0"/>
-              </a:spcAft>
-            </a:pPr>
-            <a:r>
-              <a:rPr sz="1632" b="0" i="0">
-                <a:solidFill>
-                  <a:srgbClr val="E7F0F3"/>
-                </a:solidFill>
-                <a:latin typeface="Arial"/>
-              </a:rPr>
-              <a:t>r_n: horizontal radius coordinate</a:t>
-            </a:r>
-          </a:p>
-        </p:txBody>
-      </p:sp>
-      <p:sp>
-        <p:nvSpPr>
-          <p:cNvPr id="53" name="text52" descr="sci-ppt:C2-E15-052"/>
-          <p:cNvSpPr txBox="1"/>
-          <p:nvPr/>
-        </p:nvSpPr>
-        <p:spPr>
-          <a:xfrm>
-            <a:off x="365760" y="5266944"/>
-            <a:ext cx="5547360" cy="321259"/>
-          </a:xfrm>
-          <a:prstGeom prst="rect">
-            <a:avLst/>
-          </a:prstGeom>
-          <a:noFill/>
-          <a:effectLst/>
-        </p:spPr>
-        <p:txBody>
-          <a:bodyPr wrap="none" lIns="27432" rIns="27432" tIns="18288" bIns="18288" anchor="ctr">
-            <a:spAutoFit/>
-          </a:bodyPr>
-          <a:lstStyle/>
-          <a:p>
-            <a:pPr algn="l">
-              <a:spcAft>
-                <a:spcPts val="0"/>
-              </a:spcAft>
-            </a:pPr>
-            <a:r>
-              <a:rPr sz="1632" b="0" i="0">
-                <a:solidFill>
-                  <a:srgbClr val="E7F0F3"/>
-                </a:solidFill>
-                <a:latin typeface="Arial"/>
-              </a:rPr>
-              <a:t>r_*: maximum for Δp_n &gt; 0</a:t>
-            </a:r>
-          </a:p>
-        </p:txBody>
-      </p:sp>
-      <p:sp>
-        <p:nvSpPr>
-          <p:cNvPr id="54" name="text53" descr="sci-ppt:C2-E15-053"/>
-          <p:cNvSpPr txBox="1"/>
-          <p:nvPr/>
-        </p:nvSpPr>
-        <p:spPr>
-          <a:xfrm>
-            <a:off x="365760" y="5559552"/>
-            <a:ext cx="5547360" cy="321259"/>
-          </a:xfrm>
-          <a:prstGeom prst="rect">
-            <a:avLst/>
-          </a:prstGeom>
-          <a:noFill/>
-          <a:effectLst/>
-        </p:spPr>
-        <p:txBody>
-          <a:bodyPr wrap="none" lIns="27432" rIns="27432" tIns="18288" bIns="18288" anchor="ctr">
-            <a:spAutoFit/>
-          </a:bodyPr>
-          <a:lstStyle/>
-          <a:p>
-            <a:pPr algn="l">
-              <a:spcAft>
-                <a:spcPts val="0"/>
-              </a:spcAft>
-            </a:pPr>
-            <a:r>
-              <a:rPr sz="1632" b="0" i="0">
-                <a:solidFill>
-                  <a:srgbClr val="E7F0F3"/>
-                </a:solidFill>
-                <a:latin typeface="Arial"/>
-              </a:rPr>
-              <a:t>dW/dr_n = 0 at r_*</a:t>
-            </a:r>
-          </a:p>
-        </p:txBody>
-      </p:sp>
-      <p:sp>
-        <p:nvSpPr>
-          <p:cNvPr id="55" name="text54" descr="sci-ppt:C2-E15-054"/>
-          <p:cNvSpPr txBox="1"/>
-          <p:nvPr/>
-        </p:nvSpPr>
-        <p:spPr>
-          <a:xfrm>
-            <a:off x="365760" y="5852160"/>
-            <a:ext cx="5547360" cy="321259"/>
-          </a:xfrm>
-          <a:prstGeom prst="rect">
-            <a:avLst/>
-          </a:prstGeom>
-          <a:noFill/>
-          <a:effectLst/>
-        </p:spPr>
-        <p:txBody>
-          <a:bodyPr wrap="none" lIns="27432" rIns="27432" tIns="18288" bIns="18288" anchor="ctr">
-            <a:spAutoFit/>
-          </a:bodyPr>
-          <a:lstStyle/>
-          <a:p>
-            <a:pPr algn="l">
-              <a:spcAft>
-                <a:spcPts val="0"/>
-              </a:spcAft>
-            </a:pPr>
-            <a:r>
-              <a:rPr sz="1632" b="0" i="0">
-                <a:solidFill>
-                  <a:srgbClr val="E7F0F3"/>
-                </a:solidFill>
-                <a:latin typeface="Arial"/>
-              </a:rPr>
-              <a:t>π: spherical factors</a:t>
-            </a:r>
-          </a:p>
-        </p:txBody>
-      </p:sp>
-      <p:sp>
-        <p:nvSpPr>
-          <p:cNvPr id="56" name="text55" descr="sci-ppt:C2-E15-055"/>
-          <p:cNvSpPr txBox="1"/>
-          <p:nvPr/>
-        </p:nvSpPr>
-        <p:spPr>
-          <a:xfrm>
-            <a:off x="6156960" y="4974336"/>
-            <a:ext cx="5547360" cy="321259"/>
-          </a:xfrm>
-          <a:prstGeom prst="rect">
-            <a:avLst/>
-          </a:prstGeom>
-          <a:noFill/>
-          <a:effectLst/>
-        </p:spPr>
-        <p:txBody>
-          <a:bodyPr wrap="none" lIns="27432" rIns="27432" tIns="18288" bIns="18288" anchor="ctr">
-            <a:spAutoFit/>
-          </a:bodyPr>
-          <a:lstStyle/>
-          <a:p>
-            <a:pPr algn="l">
-              <a:spcAft>
-                <a:spcPts val="0"/>
-              </a:spcAft>
-            </a:pPr>
-            <a:r>
-              <a:rPr sz="1632" b="0" i="0">
-                <a:solidFill>
-                  <a:srgbClr val="E7F0F3"/>
-                </a:solidFill>
-                <a:latin typeface="Arial"/>
-              </a:rPr>
-              <a:t>W: free-energy curve</a:t>
-            </a:r>
-          </a:p>
-        </p:txBody>
-      </p:sp>
-      <p:sp>
-        <p:nvSpPr>
-          <p:cNvPr id="57" name="text56" descr="sci-ppt:C2-E15-056"/>
-          <p:cNvSpPr txBox="1"/>
-          <p:nvPr/>
-        </p:nvSpPr>
-        <p:spPr>
-          <a:xfrm>
-            <a:off x="6156960" y="5266944"/>
-            <a:ext cx="5547360" cy="321259"/>
-          </a:xfrm>
-          <a:prstGeom prst="rect">
-            <a:avLst/>
-          </a:prstGeom>
-          <a:noFill/>
-          <a:effectLst/>
-        </p:spPr>
-        <p:txBody>
-          <a:bodyPr wrap="none" lIns="27432" rIns="27432" tIns="18288" bIns="18288" anchor="ctr">
-            <a:spAutoFit/>
-          </a:bodyPr>
-          <a:lstStyle/>
-          <a:p>
-            <a:pPr algn="l">
-              <a:spcAft>
-                <a:spcPts val="0"/>
-              </a:spcAft>
-            </a:pPr>
-            <a:r>
-              <a:rPr sz="1632" b="0" i="0">
-                <a:solidFill>
-                  <a:srgbClr val="E7F0F3"/>
-                </a:solidFill>
-                <a:latin typeface="Arial"/>
-              </a:rPr>
-              <a:t>σ_vp, Δp_n: barrier controls</a:t>
-            </a:r>
-          </a:p>
-        </p:txBody>
-      </p:sp>
-      <p:sp>
-        <p:nvSpPr>
-          <p:cNvPr id="58" name="text57" descr="sci-ppt:C2-E15-057"/>
-          <p:cNvSpPr txBox="1"/>
-          <p:nvPr/>
-        </p:nvSpPr>
-        <p:spPr>
-          <a:xfrm>
-            <a:off x="6156960" y="5559552"/>
-            <a:ext cx="5547360" cy="321259"/>
-          </a:xfrm>
-          <a:prstGeom prst="rect">
-            <a:avLst/>
-          </a:prstGeom>
-          <a:noFill/>
-          <a:effectLst/>
-        </p:spPr>
-        <p:txBody>
-          <a:bodyPr wrap="none" lIns="27432" rIns="27432" tIns="18288" bIns="18288" anchor="ctr">
-            <a:spAutoFit/>
-          </a:bodyPr>
-          <a:lstStyle/>
-          <a:p>
-            <a:pPr algn="l">
-              <a:spcAft>
-                <a:spcPts val="0"/>
-              </a:spcAft>
-            </a:pPr>
-            <a:r>
-              <a:rPr sz="1632" b="0" i="0">
-                <a:solidFill>
-                  <a:srgbClr val="E7F0F3"/>
-                </a:solidFill>
-                <a:latin typeface="Arial"/>
-              </a:rPr>
-              <a:t>d²W/dr_n² &lt; 0</a:t>
-            </a:r>
-          </a:p>
-        </p:txBody>
-      </p:sp>
-      <p:sp>
-        <p:nvSpPr>
-          <p:cNvPr id="59" name="text58" descr="sci-ppt:C2-E15-058"/>
-          <p:cNvSpPr txBox="1"/>
-          <p:nvPr/>
-        </p:nvSpPr>
-        <p:spPr>
-          <a:xfrm>
-            <a:off x="365760" y="6339840"/>
-            <a:ext cx="11277600" cy="302361"/>
-          </a:xfrm>
-          <a:prstGeom prst="rect">
-            <a:avLst/>
-          </a:prstGeom>
-          <a:noFill/>
-          <a:effectLst/>
-        </p:spPr>
-        <p:txBody>
-          <a:bodyPr wrap="none" lIns="27432" rIns="27432" tIns="18288" bIns="18288" anchor="ctr">
-            <a:spAutoFit/>
-          </a:bodyPr>
-          <a:lstStyle/>
-          <a:p>
-            <a:pPr algn="l">
-              <a:spcAft>
-                <a:spcPts val="0"/>
-              </a:spcAft>
-            </a:pPr>
-            <a:r>
-              <a:rPr sz="1536" b="0" i="0">
+              <a:rPr sz="1000" b="0" i="0">
                 <a:solidFill>
                   <a:srgbClr val="B4C7D2"/>
                 </a:solidFill>
                 <a:latin typeface="Arial"/>
               </a:rPr>
-              <a:t>Below r_* the surface term drives shrinkage in the static control</a:t>
-            </a:r>
-          </a:p>
-        </p:txBody>
-      </p:sp>
-      <p:sp>
-        <p:nvSpPr>
-          <p:cNvPr id="60" name="text59" descr="sci-ppt:C2-E15-059"/>
-          <p:cNvSpPr txBox="1"/>
-          <p:nvPr/>
-        </p:nvSpPr>
-        <p:spPr>
-          <a:xfrm>
-            <a:off x="365760" y="6632448"/>
-            <a:ext cx="11277600" cy="302361"/>
-          </a:xfrm>
-          <a:prstGeom prst="rect">
-            <a:avLst/>
-          </a:prstGeom>
-          <a:noFill/>
-          <a:effectLst/>
-        </p:spPr>
-        <p:txBody>
-          <a:bodyPr wrap="none" lIns="27432" rIns="27432" tIns="18288" bIns="18288" anchor="ctr">
-            <a:spAutoFit/>
-          </a:bodyPr>
-          <a:lstStyle/>
-          <a:p>
-            <a:pPr algn="l">
-              <a:spcAft>
-                <a:spcPts val="0"/>
-              </a:spcAft>
-            </a:pPr>
-            <a:r>
-              <a:rPr sz="1536" b="0" i="0">
-                <a:solidFill>
-                  <a:srgbClr val="B4C7D2"/>
-                </a:solidFill>
-                <a:latin typeface="Arial"/>
-              </a:rPr>
-              <a:t>No positive critical radius when Δp_n ≤ 0</a:t>
+              <a:t>Critical radius and branch check of Eq. C2-E15.</a:t>
             </a:r>
           </a:p>
         </p:txBody>
